--- a/ai4s-cg-26.pptx
+++ b/ai4s-cg-26.pptx
@@ -2,26 +2,30 @@
 <file path=ppt/presentation.xml><?xml version="1.0" encoding="utf-8"?>
 <p:presentation xmlns:a="http://schemas.openxmlformats.org/drawingml/2006/main" xmlns:r="http://schemas.openxmlformats.org/officeDocument/2006/relationships" xmlns:p="http://schemas.openxmlformats.org/presentationml/2006/main" saveSubsetFonts="1" autoCompressPictures="0">
   <p:sldMasterIdLst>
-    <p:sldMasterId id="2147483672" r:id="rId1"/>
+    <p:sldMasterId id="2147483708" r:id="rId1"/>
   </p:sldMasterIdLst>
+  <p:notesMasterIdLst>
+    <p:notesMasterId r:id="rId20"/>
+  </p:notesMasterIdLst>
   <p:sldIdLst>
     <p:sldId id="256" r:id="rId2"/>
     <p:sldId id="257" r:id="rId3"/>
     <p:sldId id="258" r:id="rId4"/>
     <p:sldId id="259" r:id="rId5"/>
-    <p:sldId id="260" r:id="rId6"/>
-    <p:sldId id="261" r:id="rId7"/>
-    <p:sldId id="262" r:id="rId8"/>
-    <p:sldId id="263" r:id="rId9"/>
-    <p:sldId id="264" r:id="rId10"/>
-    <p:sldId id="265" r:id="rId11"/>
-    <p:sldId id="266" r:id="rId12"/>
-    <p:sldId id="267" r:id="rId13"/>
-    <p:sldId id="268" r:id="rId14"/>
-    <p:sldId id="269" r:id="rId15"/>
-    <p:sldId id="270" r:id="rId16"/>
-    <p:sldId id="272" r:id="rId17"/>
-    <p:sldId id="273" r:id="rId18"/>
+    <p:sldId id="274" r:id="rId6"/>
+    <p:sldId id="260" r:id="rId7"/>
+    <p:sldId id="261" r:id="rId8"/>
+    <p:sldId id="262" r:id="rId9"/>
+    <p:sldId id="263" r:id="rId10"/>
+    <p:sldId id="264" r:id="rId11"/>
+    <p:sldId id="265" r:id="rId12"/>
+    <p:sldId id="266" r:id="rId13"/>
+    <p:sldId id="267" r:id="rId14"/>
+    <p:sldId id="268" r:id="rId15"/>
+    <p:sldId id="269" r:id="rId16"/>
+    <p:sldId id="270" r:id="rId17"/>
+    <p:sldId id="272" r:id="rId18"/>
+    <p:sldId id="273" r:id="rId19"/>
   </p:sldIdLst>
   <p:sldSz cx="12192000" cy="6858000"/>
   <p:notesSz cx="6858000" cy="9144000"/>
@@ -133,6 +137,7 @@
           <p14:sldIdLst>
             <p14:sldId id="258"/>
             <p14:sldId id="259"/>
+            <p14:sldId id="274"/>
             <p14:sldId id="260"/>
           </p14:sldIdLst>
         </p14:section>
@@ -162,8 +167,445 @@
         </p14:section>
       </p14:sectionLst>
     </p:ext>
+    <p:ext uri="{EFAFB233-063F-42B5-8137-9DF3F51BA10A}">
+      <p15:sldGuideLst xmlns:p15="http://schemas.microsoft.com/office/powerpoint/2012/main"/>
+    </p:ext>
   </p:extLst>
 </p:presentation>
+</file>
+
+<file path=ppt/notesMasters/notesMaster1.xml><?xml version="1.0" encoding="utf-8"?>
+<p:notesMaster xmlns:a="http://schemas.openxmlformats.org/drawingml/2006/main" xmlns:r="http://schemas.openxmlformats.org/officeDocument/2006/relationships" xmlns:p="http://schemas.openxmlformats.org/presentationml/2006/main">
+  <p:cSld>
+    <p:bg>
+      <p:bgRef idx="1001">
+        <a:schemeClr val="bg1"/>
+      </p:bgRef>
+    </p:bg>
+    <p:spTree>
+      <p:nvGrpSpPr>
+        <p:cNvPr id="1" name=""/>
+        <p:cNvGrpSpPr/>
+        <p:nvPr/>
+      </p:nvGrpSpPr>
+      <p:grpSpPr>
+        <a:xfrm>
+          <a:off x="0" y="0"/>
+          <a:ext cx="0" cy="0"/>
+          <a:chOff x="0" y="0"/>
+          <a:chExt cx="0" cy="0"/>
+        </a:xfrm>
+      </p:grpSpPr>
+      <p:sp>
+        <p:nvSpPr>
+          <p:cNvPr id="2" name="Header Placeholder 1"/>
+          <p:cNvSpPr>
+            <a:spLocks noGrp="1"/>
+          </p:cNvSpPr>
+          <p:nvPr>
+            <p:ph type="hdr" sz="quarter"/>
+          </p:nvPr>
+        </p:nvSpPr>
+        <p:spPr>
+          <a:xfrm>
+            <a:off x="0" y="0"/>
+            <a:ext cx="2971800" cy="458788"/>
+          </a:xfrm>
+          <a:prstGeom prst="rect">
+            <a:avLst/>
+          </a:prstGeom>
+        </p:spPr>
+        <p:txBody>
+          <a:bodyPr vert="horz" lIns="91440" tIns="45720" rIns="91440" bIns="45720" rtlCol="0"/>
+          <a:lstStyle>
+            <a:lvl1pPr algn="l">
+              <a:defRPr sz="1200"/>
+            </a:lvl1pPr>
+          </a:lstStyle>
+          <a:p>
+            <a:endParaRPr lang="en-CN"/>
+          </a:p>
+        </p:txBody>
+      </p:sp>
+      <p:sp>
+        <p:nvSpPr>
+          <p:cNvPr id="3" name="Date Placeholder 2"/>
+          <p:cNvSpPr>
+            <a:spLocks noGrp="1"/>
+          </p:cNvSpPr>
+          <p:nvPr>
+            <p:ph type="dt" idx="1"/>
+          </p:nvPr>
+        </p:nvSpPr>
+        <p:spPr>
+          <a:xfrm>
+            <a:off x="3884613" y="0"/>
+            <a:ext cx="2971800" cy="458788"/>
+          </a:xfrm>
+          <a:prstGeom prst="rect">
+            <a:avLst/>
+          </a:prstGeom>
+        </p:spPr>
+        <p:txBody>
+          <a:bodyPr vert="horz" lIns="91440" tIns="45720" rIns="91440" bIns="45720" rtlCol="0"/>
+          <a:lstStyle>
+            <a:lvl1pPr algn="r">
+              <a:defRPr sz="1200"/>
+            </a:lvl1pPr>
+          </a:lstStyle>
+          <a:p>
+            <a:fld id="{1C4120D3-7A8E-C949-99B8-124B8F561F9D}" type="datetimeFigureOut">
+              <a:rPr lang="en-CN" smtClean="0"/>
+              <a:t>2026/4/8</a:t>
+            </a:fld>
+            <a:endParaRPr lang="en-CN"/>
+          </a:p>
+        </p:txBody>
+      </p:sp>
+      <p:sp>
+        <p:nvSpPr>
+          <p:cNvPr id="4" name="Slide Image Placeholder 3"/>
+          <p:cNvSpPr>
+            <a:spLocks noGrp="1" noRot="1" noChangeAspect="1"/>
+          </p:cNvSpPr>
+          <p:nvPr>
+            <p:ph type="sldImg" idx="2"/>
+          </p:nvPr>
+        </p:nvSpPr>
+        <p:spPr>
+          <a:xfrm>
+            <a:off x="685800" y="1143000"/>
+            <a:ext cx="5486400" cy="3086100"/>
+          </a:xfrm>
+          <a:prstGeom prst="rect">
+            <a:avLst/>
+          </a:prstGeom>
+          <a:noFill/>
+          <a:ln w="12700">
+            <a:solidFill>
+              <a:prstClr val="black"/>
+            </a:solidFill>
+          </a:ln>
+        </p:spPr>
+        <p:txBody>
+          <a:bodyPr vert="horz" lIns="91440" tIns="45720" rIns="91440" bIns="45720" rtlCol="0" anchor="ctr"/>
+          <a:lstStyle/>
+          <a:p>
+            <a:endParaRPr lang="en-CN"/>
+          </a:p>
+        </p:txBody>
+      </p:sp>
+      <p:sp>
+        <p:nvSpPr>
+          <p:cNvPr id="5" name="Notes Placeholder 4"/>
+          <p:cNvSpPr>
+            <a:spLocks noGrp="1"/>
+          </p:cNvSpPr>
+          <p:nvPr>
+            <p:ph type="body" sz="quarter" idx="3"/>
+          </p:nvPr>
+        </p:nvSpPr>
+        <p:spPr>
+          <a:xfrm>
+            <a:off x="685800" y="4400550"/>
+            <a:ext cx="5486400" cy="3600450"/>
+          </a:xfrm>
+          <a:prstGeom prst="rect">
+            <a:avLst/>
+          </a:prstGeom>
+        </p:spPr>
+        <p:txBody>
+          <a:bodyPr vert="horz" lIns="91440" tIns="45720" rIns="91440" bIns="45720" rtlCol="0"/>
+          <a:lstStyle/>
+          <a:p>
+            <a:pPr lvl="0"/>
+            <a:r>
+              <a:rPr lang="en-US"/>
+              <a:t>Click to edit Master text styles</a:t>
+            </a:r>
+          </a:p>
+          <a:p>
+            <a:pPr lvl="1"/>
+            <a:r>
+              <a:rPr lang="en-US"/>
+              <a:t>Second level</a:t>
+            </a:r>
+          </a:p>
+          <a:p>
+            <a:pPr lvl="2"/>
+            <a:r>
+              <a:rPr lang="en-US"/>
+              <a:t>Third level</a:t>
+            </a:r>
+          </a:p>
+          <a:p>
+            <a:pPr lvl="3"/>
+            <a:r>
+              <a:rPr lang="en-US"/>
+              <a:t>Fourth level</a:t>
+            </a:r>
+          </a:p>
+          <a:p>
+            <a:pPr lvl="4"/>
+            <a:r>
+              <a:rPr lang="en-US"/>
+              <a:t>Fifth level</a:t>
+            </a:r>
+            <a:endParaRPr lang="en-CN"/>
+          </a:p>
+        </p:txBody>
+      </p:sp>
+      <p:sp>
+        <p:nvSpPr>
+          <p:cNvPr id="6" name="Footer Placeholder 5"/>
+          <p:cNvSpPr>
+            <a:spLocks noGrp="1"/>
+          </p:cNvSpPr>
+          <p:nvPr>
+            <p:ph type="ftr" sz="quarter" idx="4"/>
+          </p:nvPr>
+        </p:nvSpPr>
+        <p:spPr>
+          <a:xfrm>
+            <a:off x="0" y="8685213"/>
+            <a:ext cx="2971800" cy="458787"/>
+          </a:xfrm>
+          <a:prstGeom prst="rect">
+            <a:avLst/>
+          </a:prstGeom>
+        </p:spPr>
+        <p:txBody>
+          <a:bodyPr vert="horz" lIns="91440" tIns="45720" rIns="91440" bIns="45720" rtlCol="0" anchor="b"/>
+          <a:lstStyle>
+            <a:lvl1pPr algn="l">
+              <a:defRPr sz="1200"/>
+            </a:lvl1pPr>
+          </a:lstStyle>
+          <a:p>
+            <a:endParaRPr lang="en-CN"/>
+          </a:p>
+        </p:txBody>
+      </p:sp>
+      <p:sp>
+        <p:nvSpPr>
+          <p:cNvPr id="7" name="Slide Number Placeholder 6"/>
+          <p:cNvSpPr>
+            <a:spLocks noGrp="1"/>
+          </p:cNvSpPr>
+          <p:nvPr>
+            <p:ph type="sldNum" sz="quarter" idx="5"/>
+          </p:nvPr>
+        </p:nvSpPr>
+        <p:spPr>
+          <a:xfrm>
+            <a:off x="3884613" y="8685213"/>
+            <a:ext cx="2971800" cy="458787"/>
+          </a:xfrm>
+          <a:prstGeom prst="rect">
+            <a:avLst/>
+          </a:prstGeom>
+        </p:spPr>
+        <p:txBody>
+          <a:bodyPr vert="horz" lIns="91440" tIns="45720" rIns="91440" bIns="45720" rtlCol="0" anchor="b"/>
+          <a:lstStyle>
+            <a:lvl1pPr algn="r">
+              <a:defRPr sz="1200"/>
+            </a:lvl1pPr>
+          </a:lstStyle>
+          <a:p>
+            <a:fld id="{C5E2D74E-B2AB-9A40-AC6A-2E5B03E4CA7B}" type="slidenum">
+              <a:rPr lang="en-CN" smtClean="0"/>
+              <a:t>‹#›</a:t>
+            </a:fld>
+            <a:endParaRPr lang="en-CN"/>
+          </a:p>
+        </p:txBody>
+      </p:sp>
+    </p:spTree>
+    <p:extLst>
+      <p:ext uri="{BB962C8B-B14F-4D97-AF65-F5344CB8AC3E}">
+        <p14:creationId xmlns:p14="http://schemas.microsoft.com/office/powerpoint/2010/main" val="2406114825"/>
+      </p:ext>
+    </p:extLst>
+  </p:cSld>
+  <p:clrMap bg1="lt1" tx1="dk1" bg2="lt2" tx2="dk2" accent1="accent1" accent2="accent2" accent3="accent3" accent4="accent4" accent5="accent5" accent6="accent6" hlink="hlink" folHlink="folHlink"/>
+  <p:notesStyle>
+    <a:lvl1pPr marL="0" algn="l" defTabSz="914400" rtl="0" eaLnBrk="1" latinLnBrk="0" hangingPunct="1">
+      <a:defRPr sz="1200" kern="1200">
+        <a:solidFill>
+          <a:schemeClr val="tx1"/>
+        </a:solidFill>
+        <a:latin typeface="+mn-lt"/>
+        <a:ea typeface="+mn-ea"/>
+        <a:cs typeface="+mn-cs"/>
+      </a:defRPr>
+    </a:lvl1pPr>
+    <a:lvl2pPr marL="457200" algn="l" defTabSz="914400" rtl="0" eaLnBrk="1" latinLnBrk="0" hangingPunct="1">
+      <a:defRPr sz="1200" kern="1200">
+        <a:solidFill>
+          <a:schemeClr val="tx1"/>
+        </a:solidFill>
+        <a:latin typeface="+mn-lt"/>
+        <a:ea typeface="+mn-ea"/>
+        <a:cs typeface="+mn-cs"/>
+      </a:defRPr>
+    </a:lvl2pPr>
+    <a:lvl3pPr marL="914400" algn="l" defTabSz="914400" rtl="0" eaLnBrk="1" latinLnBrk="0" hangingPunct="1">
+      <a:defRPr sz="1200" kern="1200">
+        <a:solidFill>
+          <a:schemeClr val="tx1"/>
+        </a:solidFill>
+        <a:latin typeface="+mn-lt"/>
+        <a:ea typeface="+mn-ea"/>
+        <a:cs typeface="+mn-cs"/>
+      </a:defRPr>
+    </a:lvl3pPr>
+    <a:lvl4pPr marL="1371600" algn="l" defTabSz="914400" rtl="0" eaLnBrk="1" latinLnBrk="0" hangingPunct="1">
+      <a:defRPr sz="1200" kern="1200">
+        <a:solidFill>
+          <a:schemeClr val="tx1"/>
+        </a:solidFill>
+        <a:latin typeface="+mn-lt"/>
+        <a:ea typeface="+mn-ea"/>
+        <a:cs typeface="+mn-cs"/>
+      </a:defRPr>
+    </a:lvl4pPr>
+    <a:lvl5pPr marL="1828800" algn="l" defTabSz="914400" rtl="0" eaLnBrk="1" latinLnBrk="0" hangingPunct="1">
+      <a:defRPr sz="1200" kern="1200">
+        <a:solidFill>
+          <a:schemeClr val="tx1"/>
+        </a:solidFill>
+        <a:latin typeface="+mn-lt"/>
+        <a:ea typeface="+mn-ea"/>
+        <a:cs typeface="+mn-cs"/>
+      </a:defRPr>
+    </a:lvl5pPr>
+    <a:lvl6pPr marL="2286000" algn="l" defTabSz="914400" rtl="0" eaLnBrk="1" latinLnBrk="0" hangingPunct="1">
+      <a:defRPr sz="1200" kern="1200">
+        <a:solidFill>
+          <a:schemeClr val="tx1"/>
+        </a:solidFill>
+        <a:latin typeface="+mn-lt"/>
+        <a:ea typeface="+mn-ea"/>
+        <a:cs typeface="+mn-cs"/>
+      </a:defRPr>
+    </a:lvl6pPr>
+    <a:lvl7pPr marL="2743200" algn="l" defTabSz="914400" rtl="0" eaLnBrk="1" latinLnBrk="0" hangingPunct="1">
+      <a:defRPr sz="1200" kern="1200">
+        <a:solidFill>
+          <a:schemeClr val="tx1"/>
+        </a:solidFill>
+        <a:latin typeface="+mn-lt"/>
+        <a:ea typeface="+mn-ea"/>
+        <a:cs typeface="+mn-cs"/>
+      </a:defRPr>
+    </a:lvl7pPr>
+    <a:lvl8pPr marL="3200400" algn="l" defTabSz="914400" rtl="0" eaLnBrk="1" latinLnBrk="0" hangingPunct="1">
+      <a:defRPr sz="1200" kern="1200">
+        <a:solidFill>
+          <a:schemeClr val="tx1"/>
+        </a:solidFill>
+        <a:latin typeface="+mn-lt"/>
+        <a:ea typeface="+mn-ea"/>
+        <a:cs typeface="+mn-cs"/>
+      </a:defRPr>
+    </a:lvl8pPr>
+    <a:lvl9pPr marL="3657600" algn="l" defTabSz="914400" rtl="0" eaLnBrk="1" latinLnBrk="0" hangingPunct="1">
+      <a:defRPr sz="1200" kern="1200">
+        <a:solidFill>
+          <a:schemeClr val="tx1"/>
+        </a:solidFill>
+        <a:latin typeface="+mn-lt"/>
+        <a:ea typeface="+mn-ea"/>
+        <a:cs typeface="+mn-cs"/>
+      </a:defRPr>
+    </a:lvl9pPr>
+  </p:notesStyle>
+</p:notesMaster>
+</file>
+
+<file path=ppt/notesSlides/notesSlide1.xml><?xml version="1.0" encoding="utf-8"?>
+<p:notes xmlns:a="http://schemas.openxmlformats.org/drawingml/2006/main" xmlns:r="http://schemas.openxmlformats.org/officeDocument/2006/relationships" xmlns:p="http://schemas.openxmlformats.org/presentationml/2006/main">
+  <p:cSld>
+    <p:spTree>
+      <p:nvGrpSpPr>
+        <p:cNvPr id="1" name=""/>
+        <p:cNvGrpSpPr/>
+        <p:nvPr/>
+      </p:nvGrpSpPr>
+      <p:grpSpPr>
+        <a:xfrm>
+          <a:off x="0" y="0"/>
+          <a:ext cx="0" cy="0"/>
+          <a:chOff x="0" y="0"/>
+          <a:chExt cx="0" cy="0"/>
+        </a:xfrm>
+      </p:grpSpPr>
+      <p:sp>
+        <p:nvSpPr>
+          <p:cNvPr id="2" name="Slide Image Placeholder 1"/>
+          <p:cNvSpPr>
+            <a:spLocks noGrp="1" noRot="1" noChangeAspect="1"/>
+          </p:cNvSpPr>
+          <p:nvPr>
+            <p:ph type="sldImg"/>
+          </p:nvPr>
+        </p:nvSpPr>
+        <p:spPr/>
+      </p:sp>
+      <p:sp>
+        <p:nvSpPr>
+          <p:cNvPr id="3" name="Notes Placeholder 2"/>
+          <p:cNvSpPr>
+            <a:spLocks noGrp="1"/>
+          </p:cNvSpPr>
+          <p:nvPr>
+            <p:ph type="body" idx="1"/>
+          </p:nvPr>
+        </p:nvSpPr>
+        <p:spPr/>
+        <p:txBody>
+          <a:bodyPr/>
+          <a:lstStyle/>
+          <a:p>
+            <a:endParaRPr lang="en-CN" dirty="0"/>
+          </a:p>
+        </p:txBody>
+      </p:sp>
+      <p:sp>
+        <p:nvSpPr>
+          <p:cNvPr id="4" name="Slide Number Placeholder 3"/>
+          <p:cNvSpPr>
+            <a:spLocks noGrp="1"/>
+          </p:cNvSpPr>
+          <p:nvPr>
+            <p:ph type="sldNum" sz="quarter" idx="5"/>
+          </p:nvPr>
+        </p:nvSpPr>
+        <p:spPr/>
+        <p:txBody>
+          <a:bodyPr/>
+          <a:lstStyle/>
+          <a:p>
+            <a:fld id="{C5E2D74E-B2AB-9A40-AC6A-2E5B03E4CA7B}" type="slidenum">
+              <a:rPr lang="en-CN" smtClean="0"/>
+              <a:t>3</a:t>
+            </a:fld>
+            <a:endParaRPr lang="en-CN"/>
+          </a:p>
+        </p:txBody>
+      </p:sp>
+    </p:spTree>
+    <p:extLst>
+      <p:ext uri="{BB962C8B-B14F-4D97-AF65-F5344CB8AC3E}">
+        <p14:creationId xmlns:p14="http://schemas.microsoft.com/office/powerpoint/2010/main" val="2420272904"/>
+      </p:ext>
+    </p:extLst>
+  </p:cSld>
+  <p:clrMapOvr>
+    <a:masterClrMapping/>
+  </p:clrMapOvr>
+</p:notes>
 </file>
 
 <file path=ppt/slideLayouts/slideLayout1.xml><?xml version="1.0" encoding="utf-8"?>
@@ -348,7 +790,7 @@
     </p:spTree>
     <p:extLst>
       <p:ext uri="{BB962C8B-B14F-4D97-AF65-F5344CB8AC3E}">
-        <p14:creationId xmlns:p14="http://schemas.microsoft.com/office/powerpoint/2010/main" val="939931920"/>
+        <p14:creationId xmlns:p14="http://schemas.microsoft.com/office/powerpoint/2010/main" val="1336500792"/>
       </p:ext>
     </p:extLst>
   </p:cSld>
@@ -518,7 +960,7 @@
     </p:spTree>
     <p:extLst>
       <p:ext uri="{BB962C8B-B14F-4D97-AF65-F5344CB8AC3E}">
-        <p14:creationId xmlns:p14="http://schemas.microsoft.com/office/powerpoint/2010/main" val="2405758190"/>
+        <p14:creationId xmlns:p14="http://schemas.microsoft.com/office/powerpoint/2010/main" val="2780947033"/>
       </p:ext>
     </p:extLst>
   </p:cSld>
@@ -698,7 +1140,7 @@
     </p:spTree>
     <p:extLst>
       <p:ext uri="{BB962C8B-B14F-4D97-AF65-F5344CB8AC3E}">
-        <p14:creationId xmlns:p14="http://schemas.microsoft.com/office/powerpoint/2010/main" val="2816061760"/>
+        <p14:creationId xmlns:p14="http://schemas.microsoft.com/office/powerpoint/2010/main" val="2774605976"/>
       </p:ext>
     </p:extLst>
   </p:cSld>
@@ -868,7 +1310,7 @@
     </p:spTree>
     <p:extLst>
       <p:ext uri="{BB962C8B-B14F-4D97-AF65-F5344CB8AC3E}">
-        <p14:creationId xmlns:p14="http://schemas.microsoft.com/office/powerpoint/2010/main" val="1559168730"/>
+        <p14:creationId xmlns:p14="http://schemas.microsoft.com/office/powerpoint/2010/main" val="9310728"/>
       </p:ext>
     </p:extLst>
   </p:cSld>
@@ -1114,7 +1556,7 @@
     </p:spTree>
     <p:extLst>
       <p:ext uri="{BB962C8B-B14F-4D97-AF65-F5344CB8AC3E}">
-        <p14:creationId xmlns:p14="http://schemas.microsoft.com/office/powerpoint/2010/main" val="1244312300"/>
+        <p14:creationId xmlns:p14="http://schemas.microsoft.com/office/powerpoint/2010/main" val="3301138936"/>
       </p:ext>
     </p:extLst>
   </p:cSld>
@@ -1346,7 +1788,7 @@
     </p:spTree>
     <p:extLst>
       <p:ext uri="{BB962C8B-B14F-4D97-AF65-F5344CB8AC3E}">
-        <p14:creationId xmlns:p14="http://schemas.microsoft.com/office/powerpoint/2010/main" val="1684370339"/>
+        <p14:creationId xmlns:p14="http://schemas.microsoft.com/office/powerpoint/2010/main" val="2952141371"/>
       </p:ext>
     </p:extLst>
   </p:cSld>
@@ -1713,7 +2155,7 @@
     </p:spTree>
     <p:extLst>
       <p:ext uri="{BB962C8B-B14F-4D97-AF65-F5344CB8AC3E}">
-        <p14:creationId xmlns:p14="http://schemas.microsoft.com/office/powerpoint/2010/main" val="4043660385"/>
+        <p14:creationId xmlns:p14="http://schemas.microsoft.com/office/powerpoint/2010/main" val="2671633540"/>
       </p:ext>
     </p:extLst>
   </p:cSld>
@@ -1831,7 +2273,7 @@
     </p:spTree>
     <p:extLst>
       <p:ext uri="{BB962C8B-B14F-4D97-AF65-F5344CB8AC3E}">
-        <p14:creationId xmlns:p14="http://schemas.microsoft.com/office/powerpoint/2010/main" val="1767865376"/>
+        <p14:creationId xmlns:p14="http://schemas.microsoft.com/office/powerpoint/2010/main" val="1768268848"/>
       </p:ext>
     </p:extLst>
   </p:cSld>
@@ -1926,7 +2368,7 @@
     </p:spTree>
     <p:extLst>
       <p:ext uri="{BB962C8B-B14F-4D97-AF65-F5344CB8AC3E}">
-        <p14:creationId xmlns:p14="http://schemas.microsoft.com/office/powerpoint/2010/main" val="518974587"/>
+        <p14:creationId xmlns:p14="http://schemas.microsoft.com/office/powerpoint/2010/main" val="1635046400"/>
       </p:ext>
     </p:extLst>
   </p:cSld>
@@ -2203,7 +2645,7 @@
     </p:spTree>
     <p:extLst>
       <p:ext uri="{BB962C8B-B14F-4D97-AF65-F5344CB8AC3E}">
-        <p14:creationId xmlns:p14="http://schemas.microsoft.com/office/powerpoint/2010/main" val="77511776"/>
+        <p14:creationId xmlns:p14="http://schemas.microsoft.com/office/powerpoint/2010/main" val="1983769197"/>
       </p:ext>
     </p:extLst>
   </p:cSld>
@@ -2460,7 +2902,7 @@
     </p:spTree>
     <p:extLst>
       <p:ext uri="{BB962C8B-B14F-4D97-AF65-F5344CB8AC3E}">
-        <p14:creationId xmlns:p14="http://schemas.microsoft.com/office/powerpoint/2010/main" val="84929842"/>
+        <p14:creationId xmlns:p14="http://schemas.microsoft.com/office/powerpoint/2010/main" val="1402007394"/>
       </p:ext>
     </p:extLst>
   </p:cSld>
@@ -2709,23 +3151,23 @@
     </p:spTree>
     <p:extLst>
       <p:ext uri="{BB962C8B-B14F-4D97-AF65-F5344CB8AC3E}">
-        <p14:creationId xmlns:p14="http://schemas.microsoft.com/office/powerpoint/2010/main" val="1959003514"/>
+        <p14:creationId xmlns:p14="http://schemas.microsoft.com/office/powerpoint/2010/main" val="188149955"/>
       </p:ext>
     </p:extLst>
   </p:cSld>
-  <p:clrMap bg1="dk1" tx1="lt1" bg2="dk2" tx2="lt2" accent1="accent1" accent2="accent2" accent3="accent3" accent4="accent4" accent5="accent5" accent6="accent6" hlink="hlink" folHlink="folHlink"/>
+  <p:clrMap bg1="lt1" tx1="dk1" bg2="lt2" tx2="dk2" accent1="accent1" accent2="accent2" accent3="accent3" accent4="accent4" accent5="accent5" accent6="accent6" hlink="hlink" folHlink="folHlink"/>
   <p:sldLayoutIdLst>
-    <p:sldLayoutId id="2147483673" r:id="rId1"/>
-    <p:sldLayoutId id="2147483674" r:id="rId2"/>
-    <p:sldLayoutId id="2147483675" r:id="rId3"/>
-    <p:sldLayoutId id="2147483676" r:id="rId4"/>
-    <p:sldLayoutId id="2147483677" r:id="rId5"/>
-    <p:sldLayoutId id="2147483678" r:id="rId6"/>
-    <p:sldLayoutId id="2147483679" r:id="rId7"/>
-    <p:sldLayoutId id="2147483680" r:id="rId8"/>
-    <p:sldLayoutId id="2147483681" r:id="rId9"/>
-    <p:sldLayoutId id="2147483682" r:id="rId10"/>
-    <p:sldLayoutId id="2147483683" r:id="rId11"/>
+    <p:sldLayoutId id="2147483709" r:id="rId1"/>
+    <p:sldLayoutId id="2147483710" r:id="rId2"/>
+    <p:sldLayoutId id="2147483711" r:id="rId3"/>
+    <p:sldLayoutId id="2147483712" r:id="rId4"/>
+    <p:sldLayoutId id="2147483713" r:id="rId5"/>
+    <p:sldLayoutId id="2147483714" r:id="rId6"/>
+    <p:sldLayoutId id="2147483715" r:id="rId7"/>
+    <p:sldLayoutId id="2147483716" r:id="rId8"/>
+    <p:sldLayoutId id="2147483717" r:id="rId9"/>
+    <p:sldLayoutId id="2147483718" r:id="rId10"/>
+    <p:sldLayoutId id="2147483719" r:id="rId11"/>
   </p:sldLayoutIdLst>
   <p:txStyles>
     <p:titleStyle>
@@ -3139,13 +3581,32 @@
           <a:p>
             <a:r>
               <a:rPr lang="en-CN" dirty="0"/>
-              <a:t>E2E: The </a:t>
-            </a:r>
-            <a:r>
-              <a:rPr lang="en-US" dirty="0"/>
-              <a:t>Double Pendulum Example</a:t>
-            </a:r>
-            <a:endParaRPr lang="en-CN" dirty="0"/>
+              <a:t>Learn an </a:t>
+            </a:r>
+            <a:r>
+              <a:rPr lang="en-CN" dirty="0">
+                <a:solidFill>
+                  <a:srgbClr val="FF0000"/>
+                </a:solidFill>
+              </a:rPr>
+              <a:t>End</a:t>
+            </a:r>
+            <a:r>
+              <a:rPr lang="en-CN" dirty="0"/>
+              <a:t>-to-</a:t>
+            </a:r>
+            <a:r>
+              <a:rPr lang="en-CN" dirty="0">
+                <a:solidFill>
+                  <a:srgbClr val="0070C0"/>
+                </a:solidFill>
+              </a:rPr>
+              <a:t>End</a:t>
+            </a:r>
+            <a:r>
+              <a:rPr lang="en-CN" dirty="0"/>
+              <a:t> Solver (E2E)</a:t>
+            </a:r>
           </a:p>
         </p:txBody>
       </p:sp>
@@ -3172,47 +3633,98 @@
           <a:p>
             <a:r>
               <a:rPr lang="en-CN" dirty="0"/>
-              <a:t>// How To part.</a:t>
-            </a:r>
-          </a:p>
-          <a:p>
+              <a:t>Suppose we have a large set of data of some physical </a:t>
+            </a:r>
             <a:r>
               <a:rPr lang="en-US" dirty="0"/>
-              <a:t>// Step 1: generate a large amount of trajectories</a:t>
+              <a:t>phenomena, </a:t>
             </a:r>
           </a:p>
           <a:p>
             <a:r>
               <a:rPr lang="en-US" dirty="0"/>
-              <a:t>// Step 2: Train a MLP, that takes </a:t>
+              <a:t>Train a large neural network to “memorize”: given </a:t>
+            </a:r>
+            <a:r>
+              <a:rPr lang="en-US" dirty="0">
+                <a:solidFill>
+                  <a:srgbClr val="FF0000"/>
+                </a:solidFill>
+              </a:rPr>
+              <a:t>boundary/initial condition B, X_0</a:t>
+            </a:r>
+            <a:r>
+              <a:rPr lang="en-US" dirty="0"/>
+              <a:t>, and the state </a:t>
+            </a:r>
+            <a:r>
+              <a:rPr lang="en-US" dirty="0" err="1">
+                <a:solidFill>
+                  <a:srgbClr val="0070C0"/>
+                </a:solidFill>
+              </a:rPr>
+              <a:t>X_t</a:t>
+            </a:r>
+            <a:r>
+              <a:rPr lang="en-US" dirty="0"/>
+              <a:t>.</a:t>
+            </a:r>
+          </a:p>
+          <a:p>
+            <a:pPr lvl="1"/>
+            <a:r>
+              <a:rPr lang="en-US" dirty="0"/>
+              <a:t>or just x_t-1 to </a:t>
             </a:r>
             <a:r>
               <a:rPr lang="en-US" dirty="0" err="1"/>
-              <a:t>prev</a:t>
+              <a:t>x_t</a:t>
             </a:r>
             <a:r>
               <a:rPr lang="en-US" dirty="0"/>
-              <a:t> state (x, velocity), estimate next state.</a:t>
-            </a:r>
-          </a:p>
-          <a:p>
+              <a:t>, with some </a:t>
+            </a:r>
+            <a:r>
+              <a:rPr lang="en-US" dirty="0" err="1"/>
+              <a:t>bc</a:t>
+            </a:r>
             <a:r>
               <a:rPr lang="en-US" dirty="0"/>
-              <a:t>// delta t is fixed at 0.1</a:t>
-            </a:r>
-          </a:p>
-          <a:p>
-            <a:endParaRPr lang="en-US" dirty="0"/>
-          </a:p>
-          <a:p>
-            <a:endParaRPr lang="en-US" dirty="0"/>
+              <a:t>.</a:t>
+            </a:r>
+          </a:p>
+          <a:p>
+            <a:r>
+              <a:rPr lang="en-US" dirty="0"/>
+              <a:t>When will be this large set available: weather </a:t>
+            </a:r>
+            <a:r>
+              <a:rPr lang="en-US" dirty="0" err="1"/>
+              <a:t>forcast</a:t>
+            </a:r>
+            <a:r>
+              <a:rPr lang="en-US" dirty="0"/>
+              <a:t>!</a:t>
+            </a:r>
+          </a:p>
+          <a:p>
+            <a:r>
+              <a:rPr lang="en-US" dirty="0"/>
+              <a:t>// TODO: what is E2E solver, formally.</a:t>
+            </a:r>
+          </a:p>
+          <a:p>
+            <a:r>
+              <a:rPr lang="en-US" dirty="0"/>
+              <a:t>// TODO: why this will work?</a:t>
+            </a:r>
           </a:p>
         </p:txBody>
       </p:sp>
     </p:spTree>
     <p:extLst>
       <p:ext uri="{BB962C8B-B14F-4D97-AF65-F5344CB8AC3E}">
-        <p14:creationId xmlns:p14="http://schemas.microsoft.com/office/powerpoint/2010/main" val="3764673932"/>
+        <p14:creationId xmlns:p14="http://schemas.microsoft.com/office/powerpoint/2010/main" val="2947620324"/>
       </p:ext>
     </p:extLst>
   </p:cSld>
@@ -3262,11 +3774,11 @@
           <a:p>
             <a:r>
               <a:rPr lang="en-CN" dirty="0"/>
-              <a:t>E2E: </a:t>
+              <a:t>E2E: The </a:t>
             </a:r>
             <a:r>
               <a:rPr lang="en-US" dirty="0"/>
-              <a:t>Takeaways</a:t>
+              <a:t>Double Pendulum Example</a:t>
             </a:r>
             <a:endParaRPr lang="en-CN" dirty="0"/>
           </a:p>
@@ -3295,42 +3807,47 @@
           <a:p>
             <a:r>
               <a:rPr lang="en-CN" dirty="0"/>
-              <a:t>Learn to evolve/predict the states in the world model.</a:t>
-            </a:r>
-          </a:p>
-          <a:p>
-            <a:r>
-              <a:rPr lang="en-CN" dirty="0"/>
-              <a:t>// TODO: what are people caring about in State-of-the-art works:</a:t>
-            </a:r>
-          </a:p>
-          <a:p>
-            <a:r>
-              <a:rPr lang="en-CN" dirty="0"/>
-              <a:t>// 1. although cnn/gnn/rnn/Transformers works, we need a better neural architecture for prediction in simulation tasks. (e.g. neural operator)</a:t>
-            </a:r>
-          </a:p>
-          <a:p>
-            <a:r>
-              <a:rPr lang="en-CN" dirty="0"/>
-              <a:t>// 2. Integrate physical law in the neural architecture, e.g. mass conservation</a:t>
-            </a:r>
-          </a:p>
-          <a:p>
-            <a:r>
-              <a:rPr lang="en-CN" dirty="0"/>
-              <a:t>// 3. Integrate physical laws/PDE in training to save data requirements</a:t>
-            </a:r>
-          </a:p>
-          <a:p>
-            <a:endParaRPr lang="en-CN" dirty="0"/>
+              <a:t>// How To part.</a:t>
+            </a:r>
+          </a:p>
+          <a:p>
+            <a:r>
+              <a:rPr lang="en-US" dirty="0"/>
+              <a:t>// Step 1: generate a large amount of trajectories</a:t>
+            </a:r>
+          </a:p>
+          <a:p>
+            <a:r>
+              <a:rPr lang="en-US" dirty="0"/>
+              <a:t>// Step 2: Train a MLP, that takes </a:t>
+            </a:r>
+            <a:r>
+              <a:rPr lang="en-US" dirty="0" err="1"/>
+              <a:t>prev</a:t>
+            </a:r>
+            <a:r>
+              <a:rPr lang="en-US" dirty="0"/>
+              <a:t> state (x, velocity), estimate next state.</a:t>
+            </a:r>
+          </a:p>
+          <a:p>
+            <a:r>
+              <a:rPr lang="en-US" dirty="0"/>
+              <a:t>// delta t is fixed at 0.1</a:t>
+            </a:r>
+          </a:p>
+          <a:p>
+            <a:endParaRPr lang="en-US" dirty="0"/>
+          </a:p>
+          <a:p>
+            <a:endParaRPr lang="en-US" dirty="0"/>
           </a:p>
         </p:txBody>
       </p:sp>
     </p:spTree>
     <p:extLst>
       <p:ext uri="{BB962C8B-B14F-4D97-AF65-F5344CB8AC3E}">
-        <p14:creationId xmlns:p14="http://schemas.microsoft.com/office/powerpoint/2010/main" val="756378318"/>
+        <p14:creationId xmlns:p14="http://schemas.microsoft.com/office/powerpoint/2010/main" val="3764673932"/>
       </p:ext>
     </p:extLst>
   </p:cSld>
@@ -3384,7 +3901,7 @@
             </a:r>
             <a:r>
               <a:rPr lang="en-US" dirty="0"/>
-              <a:t>Takeaways (cont.)</a:t>
+              <a:t>Takeaways</a:t>
             </a:r>
             <a:endParaRPr lang="en-CN" dirty="0"/>
           </a:p>
@@ -3408,9 +3925,7 @@
         </p:nvSpPr>
         <p:spPr/>
         <p:txBody>
-          <a:bodyPr>
-            <a:normAutofit fontScale="92500"/>
-          </a:bodyPr>
+          <a:bodyPr/>
           <a:lstStyle/>
           <a:p>
             <a:r>
@@ -3421,48 +3936,28 @@
           <a:p>
             <a:r>
               <a:rPr lang="en-CN" dirty="0"/>
-              <a:t>// Advantage 1: new case only requires a forward call of the neural net. This is super fast! </a:t>
-            </a:r>
-            <a:r>
-              <a:rPr lang="en-US" dirty="0"/>
-              <a:t>A</a:t>
-            </a:r>
-            <a:r>
-              <a:rPr lang="en-CN" dirty="0"/>
-              <a:t>nd even differentiable to your input!</a:t>
-            </a:r>
-          </a:p>
-          <a:p>
-            <a:r>
-              <a:rPr lang="en-CN" dirty="0"/>
-              <a:t>// Advantage 2: Developers do NOT need to understand the physics</a:t>
-            </a:r>
-          </a:p>
-          <a:p>
-            <a:r>
-              <a:rPr lang="en-CN" dirty="0"/>
-              <a:t>// Disadvantages: data requirement. some reviewer of my paper said, acquiring the data to train a E2E solver is not cheap, so I reject your paper!</a:t>
-            </a:r>
-          </a:p>
-          <a:p>
-            <a:r>
-              <a:rPr lang="en-CN" dirty="0"/>
-              <a:t>// Disadvantages 2: difficult change the parameters (e.g. delta T in our tiny example)</a:t>
-            </a:r>
-          </a:p>
-          <a:p>
-            <a:r>
-              <a:rPr lang="en-CN" dirty="0"/>
-              <a:t>// Disadvantages 3: also not as accurate as we think… also cannot</a:t>
-            </a:r>
-            <a:r>
-              <a:rPr lang="zh-CN" altLang="en-US" dirty="0"/>
-              <a:t> </a:t>
-            </a:r>
-            <a:r>
-              <a:rPr lang="en-US" altLang="zh-CN" dirty="0"/>
-              <a:t>extrapolates to unseen case</a:t>
-            </a:r>
+              <a:t>// TODO: what are people caring about in State-of-the-art works:</a:t>
+            </a:r>
+          </a:p>
+          <a:p>
+            <a:r>
+              <a:rPr lang="en-CN" dirty="0"/>
+              <a:t>// 1. although cnn/gnn/rnn/Transformers works, we need a better neural architecture for prediction in simulation tasks. (e.g. neural operator)</a:t>
+            </a:r>
+          </a:p>
+          <a:p>
+            <a:r>
+              <a:rPr lang="en-CN" dirty="0"/>
+              <a:t>// 2. Integrate physical law in the neural architecture, e.g. mass conservation</a:t>
+            </a:r>
+          </a:p>
+          <a:p>
+            <a:r>
+              <a:rPr lang="en-CN" dirty="0"/>
+              <a:t>// 3. Integrate physical laws/PDE in training to save data requirements</a:t>
+            </a:r>
+          </a:p>
+          <a:p>
             <a:endParaRPr lang="en-CN" dirty="0"/>
           </a:p>
         </p:txBody>
@@ -3470,7 +3965,7 @@
     </p:spTree>
     <p:extLst>
       <p:ext uri="{BB962C8B-B14F-4D97-AF65-F5344CB8AC3E}">
-        <p14:creationId xmlns:p14="http://schemas.microsoft.com/office/powerpoint/2010/main" val="922049447"/>
+        <p14:creationId xmlns:p14="http://schemas.microsoft.com/office/powerpoint/2010/main" val="756378318"/>
       </p:ext>
     </p:extLst>
   </p:cSld>
@@ -3519,8 +4014,12 @@
           <a:lstStyle/>
           <a:p>
             <a:r>
+              <a:rPr lang="en-CN" dirty="0"/>
+              <a:t>E2E: </a:t>
+            </a:r>
+            <a:r>
               <a:rPr lang="en-US" dirty="0"/>
-              <a:t>Learn AI Aids for Classical Solvers</a:t>
+              <a:t>Takeaways (cont.)</a:t>
             </a:r>
             <a:endParaRPr lang="en-CN" dirty="0"/>
           </a:p>
@@ -3544,58 +4043,69 @@
         </p:nvSpPr>
         <p:spPr/>
         <p:txBody>
-          <a:bodyPr/>
-          <a:lstStyle/>
-          <a:p>
-            <a:r>
-              <a:rPr lang="en-CN" dirty="0"/>
-              <a:t>We need machine precision solution.</a:t>
-            </a:r>
-          </a:p>
-          <a:p>
-            <a:r>
-              <a:rPr lang="en-CN" dirty="0"/>
-              <a:t>We get back our PDE and classical numerical solver</a:t>
-            </a:r>
-          </a:p>
-          <a:p>
-            <a:r>
-              <a:rPr lang="en-CN" dirty="0"/>
-              <a:t>How to improve it? </a:t>
-            </a:r>
-          </a:p>
-          <a:p>
-            <a:r>
-              <a:rPr lang="en-CN" dirty="0"/>
-              <a:t>Its robustness is good, accuracy is very good. </a:t>
+          <a:bodyPr>
+            <a:normAutofit fontScale="92500"/>
+          </a:bodyPr>
+          <a:lstStyle/>
+          <a:p>
+            <a:r>
+              <a:rPr lang="en-CN" dirty="0"/>
+              <a:t>Learn to evolve/predict the states in the world model.</a:t>
+            </a:r>
+          </a:p>
+          <a:p>
+            <a:r>
+              <a:rPr lang="en-CN" dirty="0"/>
+              <a:t>// Advantage 1: new case only requires a forward call of the neural net. This is super fast! </a:t>
             </a:r>
             <a:r>
               <a:rPr lang="en-US" dirty="0"/>
-              <a:t>S</a:t>
-            </a:r>
-            <a:r>
-              <a:rPr lang="en-CN" dirty="0"/>
-              <a:t>o </a:t>
-            </a:r>
-          </a:p>
-          <a:p>
-            <a:r>
-              <a:rPr lang="en-CN" dirty="0"/>
-              <a:t>=&gt; Improve the classical solver’s efficiency!</a:t>
-            </a:r>
-          </a:p>
-          <a:p>
-            <a:r>
-              <a:rPr lang="en-CN" dirty="0"/>
-              <a:t>// TODO: what it is. Why this important.</a:t>
-            </a:r>
+              <a:t>A</a:t>
+            </a:r>
+            <a:r>
+              <a:rPr lang="en-CN" dirty="0"/>
+              <a:t>nd even differentiable to your input!</a:t>
+            </a:r>
+          </a:p>
+          <a:p>
+            <a:r>
+              <a:rPr lang="en-CN" dirty="0"/>
+              <a:t>// Advantage 2: Developers do NOT need to understand the physics</a:t>
+            </a:r>
+          </a:p>
+          <a:p>
+            <a:r>
+              <a:rPr lang="en-CN" dirty="0"/>
+              <a:t>// Disadvantages: data requirement. some reviewer of my paper said, acquiring the data to train a E2E solver is not cheap, so I reject your paper!</a:t>
+            </a:r>
+          </a:p>
+          <a:p>
+            <a:r>
+              <a:rPr lang="en-CN" dirty="0"/>
+              <a:t>// Disadvantages 2: difficult change the parameters (e.g. delta T in our tiny example)</a:t>
+            </a:r>
+          </a:p>
+          <a:p>
+            <a:r>
+              <a:rPr lang="en-CN" dirty="0"/>
+              <a:t>// Disadvantages 3: also not as accurate as we think… also cannot</a:t>
+            </a:r>
+            <a:r>
+              <a:rPr lang="zh-CN" altLang="en-US" dirty="0"/>
+              <a:t> </a:t>
+            </a:r>
+            <a:r>
+              <a:rPr lang="en-US" altLang="zh-CN" dirty="0"/>
+              <a:t>extrapolates to unseen case</a:t>
+            </a:r>
+            <a:endParaRPr lang="en-CN" dirty="0"/>
           </a:p>
         </p:txBody>
       </p:sp>
     </p:spTree>
     <p:extLst>
       <p:ext uri="{BB962C8B-B14F-4D97-AF65-F5344CB8AC3E}">
-        <p14:creationId xmlns:p14="http://schemas.microsoft.com/office/powerpoint/2010/main" val="2974895501"/>
+        <p14:creationId xmlns:p14="http://schemas.microsoft.com/office/powerpoint/2010/main" val="922049447"/>
       </p:ext>
     </p:extLst>
   </p:cSld>
@@ -3645,15 +4155,7 @@
           <a:p>
             <a:r>
               <a:rPr lang="en-US" dirty="0"/>
-              <a:t>AI Aids:</a:t>
-            </a:r>
-            <a:r>
-              <a:rPr lang="en-CN" dirty="0"/>
-              <a:t> The </a:t>
-            </a:r>
-            <a:r>
-              <a:rPr lang="en-US" dirty="0"/>
-              <a:t>Double Pendulum Example</a:t>
+              <a:t>Learn AI Aids for Classical Solvers</a:t>
             </a:r>
             <a:endParaRPr lang="en-CN" dirty="0"/>
           </a:p>
@@ -3682,24 +4184,53 @@
           <a:p>
             <a:r>
               <a:rPr lang="en-CN" dirty="0"/>
-              <a:t>// TODO: how to.</a:t>
-            </a:r>
-          </a:p>
-          <a:p>
-            <a:r>
-              <a:rPr lang="en-CN" dirty="0"/>
-              <a:t>// use RK1 implicit method and we use the network to predict a preconditioner (approximate the inverse matrix)</a:t>
-            </a:r>
-          </a:p>
-          <a:p>
-            <a:endParaRPr lang="en-CN" dirty="0"/>
+              <a:t>We need machine precision solution.</a:t>
+            </a:r>
+          </a:p>
+          <a:p>
+            <a:r>
+              <a:rPr lang="en-CN" dirty="0"/>
+              <a:t>We get back our PDE and classical numerical solver</a:t>
+            </a:r>
+          </a:p>
+          <a:p>
+            <a:r>
+              <a:rPr lang="en-CN" dirty="0"/>
+              <a:t>How to improve it? </a:t>
+            </a:r>
+          </a:p>
+          <a:p>
+            <a:r>
+              <a:rPr lang="en-CN" dirty="0"/>
+              <a:t>Its robustness is good, accuracy is very good. </a:t>
+            </a:r>
+            <a:r>
+              <a:rPr lang="en-US" dirty="0"/>
+              <a:t>S</a:t>
+            </a:r>
+            <a:r>
+              <a:rPr lang="en-CN" dirty="0"/>
+              <a:t>o </a:t>
+            </a:r>
+          </a:p>
+          <a:p>
+            <a:r>
+              <a:rPr lang="en-CN" dirty="0"/>
+              <a:t>=&gt; Improve the classical solver’s efficiency!</a:t>
+            </a:r>
+          </a:p>
+          <a:p>
+            <a:r>
+              <a:rPr lang="en-CN" dirty="0"/>
+              <a:t>// TODO: what it is. Why this important.</a:t>
+            </a:r>
           </a:p>
         </p:txBody>
       </p:sp>
     </p:spTree>
     <p:extLst>
       <p:ext uri="{BB962C8B-B14F-4D97-AF65-F5344CB8AC3E}">
-        <p14:creationId xmlns:p14="http://schemas.microsoft.com/office/powerpoint/2010/main" val="1554366757"/>
+        <p14:creationId xmlns:p14="http://schemas.microsoft.com/office/powerpoint/2010/main" val="2974895501"/>
       </p:ext>
     </p:extLst>
   </p:cSld>
@@ -3753,11 +4284,11 @@
             </a:r>
             <a:r>
               <a:rPr lang="en-CN" dirty="0"/>
-              <a:t> </a:t>
+              <a:t> The </a:t>
             </a:r>
             <a:r>
               <a:rPr lang="en-US" dirty="0"/>
-              <a:t>Takeaways</a:t>
+              <a:t>Double Pendulum Example</a:t>
             </a:r>
             <a:endParaRPr lang="en-CN" dirty="0"/>
           </a:p>
@@ -3786,57 +4317,13 @@
           <a:p>
             <a:r>
               <a:rPr lang="en-CN" dirty="0"/>
-              <a:t>// advantages: very accurate</a:t>
-            </a:r>
-          </a:p>
-          <a:p>
-            <a:r>
-              <a:rPr lang="en-CN" dirty="0"/>
-              <a:t>// disadvantages: you really need some domain knowledge. </a:t>
-            </a:r>
-            <a:r>
-              <a:rPr lang="en-US" dirty="0"/>
-              <a:t>S</a:t>
-            </a:r>
-            <a:r>
-              <a:rPr lang="en-CN" dirty="0"/>
-              <a:t>uch as</a:t>
-            </a:r>
-          </a:p>
-          <a:p>
-            <a:r>
-              <a:rPr lang="en-CN" dirty="0"/>
-              <a:t>// 1. What part is you can change? </a:t>
-            </a:r>
-            <a:r>
-              <a:rPr lang="en-US" dirty="0"/>
-              <a:t>A</a:t>
-            </a:r>
-            <a:r>
-              <a:rPr lang="en-CN" dirty="0"/>
-              <a:t>re they valuable to change?</a:t>
-            </a:r>
-          </a:p>
-          <a:p>
-            <a:r>
-              <a:rPr lang="en-CN" dirty="0"/>
-              <a:t>// 2. How? Is that really easy to train?</a:t>
-            </a:r>
-          </a:p>
-          <a:p>
-            <a:r>
-              <a:rPr lang="en-CN" dirty="0"/>
-              <a:t>// 3. </a:t>
-            </a:r>
-            <a:r>
-              <a:rPr lang="en-US" dirty="0"/>
-              <a:t>Is this method truly competitive compared to SOTAs?</a:t>
-            </a:r>
-          </a:p>
-          <a:p>
-            <a:r>
-              <a:rPr lang="en-US" dirty="0"/>
-              <a:t>// 4. If yes -&gt; write a paper; If not, go 1 :)</a:t>
+              <a:t>// TODO: how to.</a:t>
+            </a:r>
+          </a:p>
+          <a:p>
+            <a:r>
+              <a:rPr lang="en-CN" dirty="0"/>
+              <a:t>// use RK1 implicit method and we use the network to predict a preconditioner (approximate the inverse matrix)</a:t>
             </a:r>
           </a:p>
           <a:p>
@@ -3847,7 +4334,7 @@
     </p:spTree>
     <p:extLst>
       <p:ext uri="{BB962C8B-B14F-4D97-AF65-F5344CB8AC3E}">
-        <p14:creationId xmlns:p14="http://schemas.microsoft.com/office/powerpoint/2010/main" val="4142180112"/>
+        <p14:creationId xmlns:p14="http://schemas.microsoft.com/office/powerpoint/2010/main" val="1554366757"/>
       </p:ext>
     </p:extLst>
   </p:cSld>
@@ -3897,6 +4384,154 @@
           <a:p>
             <a:r>
               <a:rPr lang="en-US" dirty="0"/>
+              <a:t>AI Aids:</a:t>
+            </a:r>
+            <a:r>
+              <a:rPr lang="en-CN" dirty="0"/>
+              <a:t> </a:t>
+            </a:r>
+            <a:r>
+              <a:rPr lang="en-US" dirty="0"/>
+              <a:t>Takeaways</a:t>
+            </a:r>
+            <a:endParaRPr lang="en-CN" dirty="0"/>
+          </a:p>
+        </p:txBody>
+      </p:sp>
+      <p:sp>
+        <p:nvSpPr>
+          <p:cNvPr id="3" name="Content Placeholder 2">
+            <a:extLst>
+              <a:ext uri="{FF2B5EF4-FFF2-40B4-BE49-F238E27FC236}">
+                <a16:creationId xmlns:a16="http://schemas.microsoft.com/office/drawing/2014/main" id="{A8FE1EB0-9FFA-1346-918E-0FD966E98BF7}"/>
+              </a:ext>
+            </a:extLst>
+          </p:cNvPr>
+          <p:cNvSpPr>
+            <a:spLocks noGrp="1"/>
+          </p:cNvSpPr>
+          <p:nvPr>
+            <p:ph idx="1"/>
+          </p:nvPr>
+        </p:nvSpPr>
+        <p:spPr/>
+        <p:txBody>
+          <a:bodyPr/>
+          <a:lstStyle/>
+          <a:p>
+            <a:r>
+              <a:rPr lang="en-CN" dirty="0"/>
+              <a:t>// advantages: very accurate</a:t>
+            </a:r>
+          </a:p>
+          <a:p>
+            <a:r>
+              <a:rPr lang="en-CN" dirty="0"/>
+              <a:t>// disadvantages: you really need some domain knowledge. </a:t>
+            </a:r>
+            <a:r>
+              <a:rPr lang="en-US" dirty="0"/>
+              <a:t>S</a:t>
+            </a:r>
+            <a:r>
+              <a:rPr lang="en-CN" dirty="0"/>
+              <a:t>uch as</a:t>
+            </a:r>
+          </a:p>
+          <a:p>
+            <a:r>
+              <a:rPr lang="en-CN" dirty="0"/>
+              <a:t>// 1. What part is you can change? </a:t>
+            </a:r>
+            <a:r>
+              <a:rPr lang="en-US" dirty="0"/>
+              <a:t>A</a:t>
+            </a:r>
+            <a:r>
+              <a:rPr lang="en-CN" dirty="0"/>
+              <a:t>re they valuable to change?</a:t>
+            </a:r>
+          </a:p>
+          <a:p>
+            <a:r>
+              <a:rPr lang="en-CN" dirty="0"/>
+              <a:t>// 2. How? Is that really easy to train?</a:t>
+            </a:r>
+          </a:p>
+          <a:p>
+            <a:r>
+              <a:rPr lang="en-CN" dirty="0"/>
+              <a:t>// 3. </a:t>
+            </a:r>
+            <a:r>
+              <a:rPr lang="en-US" dirty="0"/>
+              <a:t>Is this method truly competitive compared to SOTAs?</a:t>
+            </a:r>
+          </a:p>
+          <a:p>
+            <a:r>
+              <a:rPr lang="en-US" dirty="0"/>
+              <a:t>// 4. If yes -&gt; write a paper; If not, go 1 :)</a:t>
+            </a:r>
+          </a:p>
+          <a:p>
+            <a:endParaRPr lang="en-CN" dirty="0"/>
+          </a:p>
+        </p:txBody>
+      </p:sp>
+    </p:spTree>
+    <p:extLst>
+      <p:ext uri="{BB962C8B-B14F-4D97-AF65-F5344CB8AC3E}">
+        <p14:creationId xmlns:p14="http://schemas.microsoft.com/office/powerpoint/2010/main" val="4142180112"/>
+      </p:ext>
+    </p:extLst>
+  </p:cSld>
+  <p:clrMapOvr>
+    <a:masterClrMapping/>
+  </p:clrMapOvr>
+</p:sld>
+</file>
+
+<file path=ppt/slides/slide17.xml><?xml version="1.0" encoding="utf-8"?>
+<p:sld xmlns:a="http://schemas.openxmlformats.org/drawingml/2006/main" xmlns:r="http://schemas.openxmlformats.org/officeDocument/2006/relationships" xmlns:p="http://schemas.openxmlformats.org/presentationml/2006/main">
+  <p:cSld>
+    <p:spTree>
+      <p:nvGrpSpPr>
+        <p:cNvPr id="1" name=""/>
+        <p:cNvGrpSpPr/>
+        <p:nvPr/>
+      </p:nvGrpSpPr>
+      <p:grpSpPr>
+        <a:xfrm>
+          <a:off x="0" y="0"/>
+          <a:ext cx="0" cy="0"/>
+          <a:chOff x="0" y="0"/>
+          <a:chExt cx="0" cy="0"/>
+        </a:xfrm>
+      </p:grpSpPr>
+      <p:sp>
+        <p:nvSpPr>
+          <p:cNvPr id="2" name="Title 1">
+            <a:extLst>
+              <a:ext uri="{FF2B5EF4-FFF2-40B4-BE49-F238E27FC236}">
+                <a16:creationId xmlns:a16="http://schemas.microsoft.com/office/drawing/2014/main" id="{BD90F0B3-2404-3047-B71E-8A42D8F963AB}"/>
+              </a:ext>
+            </a:extLst>
+          </p:cNvPr>
+          <p:cNvSpPr>
+            <a:spLocks noGrp="1"/>
+          </p:cNvSpPr>
+          <p:nvPr>
+            <p:ph type="title"/>
+          </p:nvPr>
+        </p:nvSpPr>
+        <p:spPr/>
+        <p:txBody>
+          <a:bodyPr/>
+          <a:lstStyle/>
+          <a:p>
+            <a:r>
+              <a:rPr lang="en-US" dirty="0"/>
               <a:t>AI Aids: Takeaways</a:t>
             </a:r>
             <a:endParaRPr lang="en-CN" dirty="0"/>
@@ -3977,7 +4612,7 @@
 </p:sld>
 </file>
 
-<file path=ppt/slides/slide17.xml><?xml version="1.0" encoding="utf-8"?>
+<file path=ppt/slides/slide18.xml><?xml version="1.0" encoding="utf-8"?>
 <p:sld xmlns:a="http://schemas.openxmlformats.org/drawingml/2006/main" xmlns:r="http://schemas.openxmlformats.org/officeDocument/2006/relationships" xmlns:p="http://schemas.openxmlformats.org/presentationml/2006/main">
   <p:cSld>
     <p:spTree>
@@ -4365,21 +5000,8 @@
               <a:t> PDEs</a:t>
             </a:r>
             <a:r>
-              <a:rPr kumimoji="0" lang="en-CN" sz="2800" b="0" i="0" u="none" strike="noStrike" kern="1200" cap="none" spc="0" normalizeH="0" baseline="0" noProof="0" dirty="0">
-                <a:ln>
-                  <a:noFill/>
-                </a:ln>
-                <a:solidFill>
-                  <a:prstClr val="white"/>
-                </a:solidFill>
-                <a:effectLst/>
-                <a:uLnTx/>
-                <a:uFillTx/>
-                <a:latin typeface="Calibri" panose="020F0502020204030204"/>
-                <a:ea typeface="+mn-ea"/>
-                <a:cs typeface="+mn-cs"/>
-              </a:rPr>
-              <a:t>, to </a:t>
+              <a:rPr lang="en-CN" dirty="0"/>
+              <a:t> to </a:t>
             </a:r>
             <a:r>
               <a:rPr kumimoji="0" lang="en-CN" sz="2800" b="0" i="0" u="none" strike="noStrike" kern="1200" cap="none" spc="0" normalizeH="0" baseline="0" noProof="0" dirty="0">
@@ -4458,45 +5080,101 @@
           <a:lstStyle/>
           <a:p>
             <a:r>
-              <a:rPr lang="en-CN" dirty="0"/>
-              <a:t>Example:</a:t>
-            </a:r>
-            <a:r>
-              <a:rPr lang="zh-CN" altLang="en-US" dirty="0"/>
-              <a:t> </a:t>
-            </a:r>
-            <a:r>
-              <a:rPr lang="en-US" i="0" dirty="0">
-                <a:solidFill>
-                  <a:srgbClr val="FFFFFF"/>
-                </a:solidFill>
-                <a:effectLst/>
-                <a:latin typeface="ui-serif"/>
-              </a:rPr>
-              <a:t>Double</a:t>
-            </a:r>
-            <a:r>
-              <a:rPr lang="en-US" i="0" u="none" strike="noStrike" dirty="0">
-                <a:solidFill>
-                  <a:srgbClr val="FFFFFF"/>
-                </a:solidFill>
-                <a:effectLst/>
-                <a:latin typeface="ui-serif"/>
-              </a:rPr>
-              <a:t> Pendulum</a:t>
-            </a:r>
-          </a:p>
-        </p:txBody>
-      </p:sp>
-      <p:sp>
-        <p:nvSpPr>
-          <p:cNvPr id="3" name="Content Placeholder 2">
+              <a:rPr dirty="0"/>
+              <a:t>Example: Double Pendulum</a:t>
+            </a:r>
+          </a:p>
+        </p:txBody>
+      </p:sp>
+      <p:sp>
+        <p:nvSpPr>
+          <p:cNvPr id="5" name="DiscreteSolverCaption"/>
+          <p:cNvSpPr txBox="1"/>
+          <p:nvPr/>
+        </p:nvSpPr>
+        <p:spPr>
+          <a:xfrm>
+            <a:off x="8830411" y="4086374"/>
+            <a:ext cx="3159095" cy="276999"/>
+          </a:xfrm>
+          <a:prstGeom prst="rect">
+            <a:avLst/>
+          </a:prstGeom>
+          <a:noFill/>
+        </p:spPr>
+        <p:txBody>
+          <a:bodyPr wrap="square">
+            <a:spAutoFit/>
+          </a:bodyPr>
+          <a:lstStyle/>
+          <a:p>
+            <a:pPr algn="ctr"/>
+            <a:r>
+              <a:rPr lang="en-US" sz="1200" dirty="0" err="1"/>
+              <a:t>Run</a:t>
+            </a:r>
+            <a:r>
+              <a:rPr sz="1200" dirty="0" err="1"/>
+              <a:t>`</a:t>
+            </a:r>
+            <a:r>
+              <a:rPr lang="en-US" sz="1200" dirty="0" err="1"/>
+              <a:t>python</a:t>
+            </a:r>
+            <a:r>
+              <a:rPr lang="en-US" sz="1200" dirty="0"/>
+              <a:t> 00-discrete-solver/</a:t>
+            </a:r>
+            <a:r>
+              <a:rPr lang="en-US" sz="1200" dirty="0" err="1"/>
+              <a:t>simulate.py</a:t>
+            </a:r>
+            <a:r>
+              <a:rPr sz="1200" dirty="0"/>
+              <a:t>`.</a:t>
+            </a:r>
+          </a:p>
+        </p:txBody>
+      </p:sp>
+      <p:pic>
+        <p:nvPicPr>
+          <p:cNvPr id="10" name="Picture 9">
             <a:extLst>
               <a:ext uri="{FF2B5EF4-FFF2-40B4-BE49-F238E27FC236}">
-                <a16:creationId xmlns:a16="http://schemas.microsoft.com/office/drawing/2014/main" id="{E8E02550-5983-EE4A-B67B-C4A65C86C274}"/>
+                <a16:creationId xmlns:a16="http://schemas.microsoft.com/office/drawing/2014/main" id="{B9AE1F5B-EA15-DD4D-87CC-ECC6A4E2D535}"/>
               </a:ext>
             </a:extLst>
           </p:cNvPr>
+          <p:cNvPicPr>
+            <a:picLocks noChangeAspect="1"/>
+          </p:cNvPicPr>
+          <p:nvPr/>
+        </p:nvPicPr>
+        <p:blipFill>
+          <a:blip r:embed="rId2"/>
+          <a:stretch>
+            <a:fillRect/>
+          </a:stretch>
+        </p:blipFill>
+        <p:spPr>
+          <a:xfrm>
+            <a:off x="8627918" y="522292"/>
+            <a:ext cx="3564082" cy="3564082"/>
+          </a:xfrm>
+          <a:prstGeom prst="rect">
+            <a:avLst/>
+          </a:prstGeom>
+        </p:spPr>
+      </p:pic>
+      <p:sp>
+        <p:nvSpPr>
+          <p:cNvPr id="11" name="Content Placeholder 2">
+            <a:extLst>
+              <a:ext uri="{FF2B5EF4-FFF2-40B4-BE49-F238E27FC236}">
+                <a16:creationId xmlns:a16="http://schemas.microsoft.com/office/drawing/2014/main" id="{67DE32C6-9930-DD43-95BD-6356B6FAD03F}"/>
+              </a:ext>
+            </a:extLst>
+          </p:cNvPr>
           <p:cNvSpPr>
             <a:spLocks noGrp="1"/>
           </p:cNvSpPr>
@@ -4504,86 +5182,102 @@
             <p:ph idx="1"/>
           </p:nvPr>
         </p:nvSpPr>
-        <p:spPr/>
-        <p:txBody>
-          <a:bodyPr/>
-          <a:lstStyle/>
-          <a:p>
-            <a:r>
-              <a:rPr lang="en-CN" dirty="0"/>
-              <a:t>Example:</a:t>
-            </a:r>
-            <a:r>
-              <a:rPr lang="zh-CN" altLang="en-US" dirty="0"/>
-              <a:t> </a:t>
-            </a:r>
-            <a:r>
-              <a:rPr lang="en-US" i="0" dirty="0">
-                <a:solidFill>
-                  <a:srgbClr val="FFFFFF"/>
-                </a:solidFill>
-                <a:effectLst/>
-                <a:latin typeface="ui-serif"/>
-              </a:rPr>
-              <a:t>Double</a:t>
-            </a:r>
-            <a:r>
-              <a:rPr lang="en-US" i="0" u="none" strike="noStrike" dirty="0">
-                <a:solidFill>
-                  <a:srgbClr val="FFFFFF"/>
-                </a:solidFill>
-                <a:effectLst/>
-                <a:latin typeface="ui-serif"/>
-              </a:rPr>
-              <a:t> Pendulum</a:t>
-            </a:r>
-          </a:p>
-          <a:p>
-            <a:r>
-              <a:rPr lang="en-US" i="0" u="none" strike="noStrike" dirty="0">
-                <a:solidFill>
-                  <a:srgbClr val="FFFFFF"/>
-                </a:solidFill>
-                <a:effectLst/>
-                <a:latin typeface="ui-serif"/>
-              </a:rPr>
-              <a:t>// </a:t>
+        <p:spPr>
+          <a:xfrm>
+            <a:off x="838200" y="1825625"/>
+            <a:ext cx="7568045" cy="4351338"/>
+          </a:xfrm>
+        </p:spPr>
+        <p:txBody>
+          <a:bodyPr/>
+          <a:lstStyle/>
+          <a:p>
+            <a:r>
+              <a:rPr lang="en-US" b="1" dirty="0"/>
+              <a:t>Physical law</a:t>
+            </a:r>
+            <a:r>
+              <a:rPr lang="en-US" dirty="0"/>
+              <a:t>: Newton/Lagrange mechanics gives coupled nonlinear </a:t>
             </a:r>
             <a:r>
               <a:rPr lang="en-US" dirty="0">
                 <a:solidFill>
-                  <a:srgbClr val="FFFFFF"/>
+                  <a:srgbClr val="0070C0"/>
                 </a:solidFill>
-                <a:latin typeface="ui-serif"/>
               </a:rPr>
-              <a:t>TODO what is the model mathematically? Maps from x, t to x.</a:t>
-            </a:r>
-          </a:p>
-          <a:p>
-            <a:r>
-              <a:rPr lang="en-US" i="0" u="none" strike="noStrike" dirty="0">
-                <a:solidFill>
-                  <a:srgbClr val="FFFFFF"/>
-                </a:solidFill>
-                <a:effectLst/>
-                <a:latin typeface="ui-serif"/>
-              </a:rPr>
-              <a:t>// TODO the physical law behind it.</a:t>
-            </a:r>
-          </a:p>
-          <a:p>
+              <a:t>ODEs</a:t>
+            </a:r>
+            <a:r>
+              <a:rPr lang="en-US" dirty="0"/>
+              <a:t> for the two joint angles.</a:t>
+            </a:r>
+          </a:p>
+          <a:p>
+            <a:r>
+              <a:rPr lang="en-US" b="1" dirty="0"/>
+              <a:t>Simulation</a:t>
+            </a:r>
+            <a:r>
+              <a:rPr lang="en-US" dirty="0"/>
+              <a:t>: choose parameters and initial angles/velocities, then compute the ODE forward in time via </a:t>
+            </a:r>
             <a:r>
               <a:rPr lang="en-US" dirty="0">
                 <a:solidFill>
-                  <a:srgbClr val="FFFFFF"/>
+                  <a:srgbClr val="FF0000"/>
                 </a:solidFill>
-                <a:latin typeface="ui-serif"/>
               </a:rPr>
-              <a:t>// TODO how to do simulation? How to discretize the space and time.</a:t>
-            </a:r>
-          </a:p>
-        </p:txBody>
-      </p:sp>
+              <a:t>numerical integration</a:t>
+            </a:r>
+            <a:r>
+              <a:rPr lang="en-US" dirty="0">
+                <a:solidFill>
+                  <a:srgbClr val="0070C0"/>
+                </a:solidFill>
+              </a:rPr>
+              <a:t> </a:t>
+            </a:r>
+            <a:r>
+              <a:rPr lang="en-US" dirty="0"/>
+              <a:t>(e.g. Euler, RK)</a:t>
+            </a:r>
+          </a:p>
+          <a:p>
+            <a:endParaRPr lang="en-US" dirty="0"/>
+          </a:p>
+        </p:txBody>
+      </p:sp>
+      <p:pic>
+        <p:nvPicPr>
+          <p:cNvPr id="12" name="Picture 11">
+            <a:extLst>
+              <a:ext uri="{FF2B5EF4-FFF2-40B4-BE49-F238E27FC236}">
+                <a16:creationId xmlns:a16="http://schemas.microsoft.com/office/drawing/2014/main" id="{616E72ED-6A45-0B4D-989C-F7AC03ADD900}"/>
+              </a:ext>
+            </a:extLst>
+          </p:cNvPr>
+          <p:cNvPicPr>
+            <a:picLocks noChangeAspect="1"/>
+          </p:cNvPicPr>
+          <p:nvPr/>
+        </p:nvPicPr>
+        <p:blipFill>
+          <a:blip r:embed="rId3"/>
+          <a:stretch>
+            <a:fillRect/>
+          </a:stretch>
+        </p:blipFill>
+        <p:spPr>
+          <a:xfrm>
+            <a:off x="1101436" y="4552914"/>
+            <a:ext cx="10433112" cy="1782794"/>
+          </a:xfrm>
+          <a:prstGeom prst="rect">
+            <a:avLst/>
+          </a:prstGeom>
+        </p:spPr>
+      </p:pic>
     </p:spTree>
     <p:extLst>
       <p:ext uri="{BB962C8B-B14F-4D97-AF65-F5344CB8AC3E}">
@@ -4636,168 +5330,137 @@
           <a:lstStyle/>
           <a:p>
             <a:r>
-              <a:rPr lang="en-CN" dirty="0"/>
-              <a:t>Introduction: World Model (cont.)</a:t>
-            </a:r>
-          </a:p>
-        </p:txBody>
-      </p:sp>
-      <p:sp>
-        <p:nvSpPr>
-          <p:cNvPr id="3" name="Content Placeholder 2">
+              <a:rPr dirty="0"/>
+              <a:t>Example: Double Pendulum</a:t>
+            </a:r>
+            <a:r>
+              <a:rPr lang="en-US" dirty="0"/>
+              <a:t> (Cont.)</a:t>
+            </a:r>
+            <a:endParaRPr dirty="0"/>
+          </a:p>
+        </p:txBody>
+      </p:sp>
+      <p:sp>
+        <p:nvSpPr>
+          <p:cNvPr id="7" name="DiscreteSolverCaption">
             <a:extLst>
               <a:ext uri="{FF2B5EF4-FFF2-40B4-BE49-F238E27FC236}">
-                <a16:creationId xmlns:a16="http://schemas.microsoft.com/office/drawing/2014/main" id="{E8E02550-5983-EE4A-B67B-C4A65C86C274}"/>
+                <a16:creationId xmlns:a16="http://schemas.microsoft.com/office/drawing/2014/main" id="{35C39CB3-F28E-9C48-8D5B-EC225191D647}"/>
               </a:ext>
             </a:extLst>
           </p:cNvPr>
-          <p:cNvSpPr>
-            <a:spLocks noGrp="1"/>
-          </p:cNvSpPr>
-          <p:nvPr>
-            <p:ph idx="1"/>
-          </p:nvPr>
-        </p:nvSpPr>
-        <p:spPr/>
-        <p:txBody>
-          <a:bodyPr/>
-          <a:lstStyle/>
-          <a:p>
-            <a:pPr marL="0" indent="0">
-              <a:buNone/>
-            </a:pPr>
-            <a:r>
-              <a:rPr lang="en-US" dirty="0"/>
-              <a:t>Why is important:</a:t>
-            </a:r>
-          </a:p>
-          <a:p>
-            <a:r>
-              <a:rPr lang="en-US" b="1" dirty="0"/>
-              <a:t>Perceive</a:t>
-            </a:r>
-            <a:r>
-              <a:rPr lang="en-US" dirty="0"/>
-              <a:t>: abstract the external world to gain a deep understanding of its underlying mechanisms</a:t>
-            </a:r>
-          </a:p>
-          <a:p>
-            <a:r>
-              <a:rPr lang="en-US" b="1" dirty="0"/>
-              <a:t>Predict</a:t>
-            </a:r>
-            <a:r>
-              <a:rPr lang="en-US" dirty="0"/>
-              <a:t>: possess the capacity to envision possible future states to inform decision-making.</a:t>
-            </a:r>
-          </a:p>
-          <a:p>
-            <a:pPr marL="0" indent="0">
-              <a:buNone/>
-            </a:pPr>
-            <a:r>
-              <a:rPr lang="en-US" dirty="0"/>
-              <a:t>How to (the classical way):</a:t>
-            </a:r>
-          </a:p>
-          <a:p>
-            <a:r>
-              <a:rPr lang="en-CN" b="1" dirty="0"/>
-              <a:t>Derive from physics laws</a:t>
-            </a:r>
-            <a:r>
-              <a:rPr lang="en-CN" dirty="0"/>
-              <a:t>:  from </a:t>
-            </a:r>
-            <a:r>
-              <a:rPr lang="en-CN" dirty="0">
-                <a:solidFill>
-                  <a:srgbClr val="0070C0"/>
-                </a:solidFill>
-              </a:rPr>
-              <a:t>Newton’s Laws, </a:t>
-            </a:r>
-            <a:r>
-              <a:rPr lang="en-US" dirty="0">
-                <a:solidFill>
-                  <a:srgbClr val="0070C0"/>
-                </a:solidFill>
-              </a:rPr>
-              <a:t>constitutive equations, and</a:t>
-            </a:r>
-            <a:r>
-              <a:rPr kumimoji="0" lang="en-CN" sz="2800" b="0" i="0" u="none" strike="noStrike" kern="1200" cap="none" spc="0" normalizeH="0" baseline="0" noProof="0" dirty="0">
-                <a:ln>
-                  <a:noFill/>
-                </a:ln>
-                <a:solidFill>
-                  <a:srgbClr val="0070C0"/>
-                </a:solidFill>
-                <a:effectLst/>
-                <a:uLnTx/>
-                <a:uFillTx/>
-                <a:latin typeface="Calibri" panose="020F0502020204030204"/>
-                <a:ea typeface="+mn-ea"/>
-                <a:cs typeface="+mn-cs"/>
-              </a:rPr>
-              <a:t> PDEs</a:t>
-            </a:r>
-            <a:r>
-              <a:rPr kumimoji="0" lang="en-CN" sz="2800" b="0" i="0" u="none" strike="noStrike" kern="1200" cap="none" spc="0" normalizeH="0" baseline="0" noProof="0" dirty="0">
-                <a:ln>
-                  <a:noFill/>
-                </a:ln>
-                <a:solidFill>
-                  <a:prstClr val="white"/>
-                </a:solidFill>
-                <a:effectLst/>
-                <a:uLnTx/>
-                <a:uFillTx/>
-                <a:latin typeface="Calibri" panose="020F0502020204030204"/>
-                <a:ea typeface="+mn-ea"/>
-                <a:cs typeface="+mn-cs"/>
-              </a:rPr>
-              <a:t>, to </a:t>
-            </a:r>
-            <a:r>
-              <a:rPr kumimoji="0" lang="en-CN" sz="2800" b="0" i="0" u="none" strike="noStrike" kern="1200" cap="none" spc="0" normalizeH="0" baseline="0" noProof="0" dirty="0">
-                <a:ln>
-                  <a:noFill/>
-                </a:ln>
-                <a:solidFill>
-                  <a:srgbClr val="FF0000"/>
-                </a:solidFill>
-                <a:effectLst/>
-                <a:uLnTx/>
-                <a:uFillTx/>
-                <a:latin typeface="Calibri" panose="020F0502020204030204"/>
-                <a:ea typeface="+mn-ea"/>
-                <a:cs typeface="+mn-cs"/>
-              </a:rPr>
-              <a:t>discretized ODE/linear systems</a:t>
-            </a:r>
-          </a:p>
-          <a:p>
-            <a:r>
-              <a:rPr lang="en-CN" b="1" dirty="0"/>
-              <a:t>Learn from data/physics laws</a:t>
-            </a:r>
-            <a:r>
-              <a:rPr lang="en-CN" dirty="0"/>
-              <a:t>: today’s talk</a:t>
-            </a:r>
-            <a:endParaRPr lang="en-CN" dirty="0">
-              <a:solidFill>
-                <a:srgbClr val="FF0000"/>
-              </a:solidFill>
-            </a:endParaRPr>
-          </a:p>
-        </p:txBody>
-      </p:sp>
+          <p:cNvSpPr txBox="1"/>
+          <p:nvPr/>
+        </p:nvSpPr>
+        <p:spPr>
+          <a:xfrm>
+            <a:off x="8830411" y="5367580"/>
+            <a:ext cx="3159095" cy="276999"/>
+          </a:xfrm>
+          <a:prstGeom prst="rect">
+            <a:avLst/>
+          </a:prstGeom>
+          <a:noFill/>
+        </p:spPr>
+        <p:txBody>
+          <a:bodyPr wrap="square">
+            <a:spAutoFit/>
+          </a:bodyPr>
+          <a:lstStyle/>
+          <a:p>
+            <a:pPr algn="ctr"/>
+            <a:r>
+              <a:rPr lang="en-US" sz="1200" dirty="0" err="1"/>
+              <a:t>Run</a:t>
+            </a:r>
+            <a:r>
+              <a:rPr sz="1200" dirty="0" err="1"/>
+              <a:t>`</a:t>
+            </a:r>
+            <a:r>
+              <a:rPr lang="en-US" sz="1200" dirty="0" err="1"/>
+              <a:t>python</a:t>
+            </a:r>
+            <a:r>
+              <a:rPr lang="en-US" sz="1200" dirty="0"/>
+              <a:t> 00-discrete-solver/</a:t>
+            </a:r>
+            <a:r>
+              <a:rPr lang="en-US" sz="1200" dirty="0" err="1"/>
+              <a:t>simulate.py</a:t>
+            </a:r>
+            <a:r>
+              <a:rPr sz="1200" dirty="0"/>
+              <a:t>`.</a:t>
+            </a:r>
+          </a:p>
+        </p:txBody>
+      </p:sp>
+      <p:pic>
+        <p:nvPicPr>
+          <p:cNvPr id="8" name="Picture 7">
+            <a:extLst>
+              <a:ext uri="{FF2B5EF4-FFF2-40B4-BE49-F238E27FC236}">
+                <a16:creationId xmlns:a16="http://schemas.microsoft.com/office/drawing/2014/main" id="{55EED1D7-C6FF-3B46-AB68-5DAFAF152845}"/>
+              </a:ext>
+            </a:extLst>
+          </p:cNvPr>
+          <p:cNvPicPr>
+            <a:picLocks noChangeAspect="1"/>
+          </p:cNvPicPr>
+          <p:nvPr/>
+        </p:nvPicPr>
+        <p:blipFill>
+          <a:blip r:embed="rId2"/>
+          <a:stretch>
+            <a:fillRect/>
+          </a:stretch>
+        </p:blipFill>
+        <p:spPr>
+          <a:xfrm>
+            <a:off x="8627918" y="1803498"/>
+            <a:ext cx="3564082" cy="3564082"/>
+          </a:xfrm>
+          <a:prstGeom prst="rect">
+            <a:avLst/>
+          </a:prstGeom>
+        </p:spPr>
+      </p:pic>
+      <p:pic>
+        <p:nvPicPr>
+          <p:cNvPr id="6" name="Picture 5">
+            <a:extLst>
+              <a:ext uri="{FF2B5EF4-FFF2-40B4-BE49-F238E27FC236}">
+                <a16:creationId xmlns:a16="http://schemas.microsoft.com/office/drawing/2014/main" id="{87108B78-0916-7048-B1ED-A315013FC1B6}"/>
+              </a:ext>
+            </a:extLst>
+          </p:cNvPr>
+          <p:cNvPicPr>
+            <a:picLocks noChangeAspect="1"/>
+          </p:cNvPicPr>
+          <p:nvPr/>
+        </p:nvPicPr>
+        <p:blipFill>
+          <a:blip r:embed="rId3"/>
+          <a:stretch>
+            <a:fillRect/>
+          </a:stretch>
+        </p:blipFill>
+        <p:spPr>
+          <a:xfrm>
+            <a:off x="838200" y="1803498"/>
+            <a:ext cx="6840682" cy="4648699"/>
+          </a:xfrm>
+          <a:prstGeom prst="rect">
+            <a:avLst/>
+          </a:prstGeom>
+        </p:spPr>
+      </p:pic>
     </p:spTree>
     <p:extLst>
       <p:ext uri="{BB962C8B-B14F-4D97-AF65-F5344CB8AC3E}">
-        <p14:creationId xmlns:p14="http://schemas.microsoft.com/office/powerpoint/2010/main" val="2397593720"/>
+        <p14:creationId xmlns:p14="http://schemas.microsoft.com/office/powerpoint/2010/main" val="87504184"/>
       </p:ext>
     </p:extLst>
   </p:cSld>
@@ -4829,7 +5492,7 @@
           <p:cNvPr id="2" name="Title 1">
             <a:extLst>
               <a:ext uri="{FF2B5EF4-FFF2-40B4-BE49-F238E27FC236}">
-                <a16:creationId xmlns:a16="http://schemas.microsoft.com/office/drawing/2014/main" id="{BD90F0B3-2404-3047-B71E-8A42D8F963AB}"/>
+                <a16:creationId xmlns:a16="http://schemas.microsoft.com/office/drawing/2014/main" id="{60840ADB-512A-5447-8CAB-B1A2041C3B1F}"/>
               </a:ext>
             </a:extLst>
           </p:cNvPr>
@@ -4846,12 +5509,78 @@
           <a:lstStyle/>
           <a:p>
             <a:r>
-              <a:rPr lang="en-CN" dirty="0">
-                <a:solidFill>
-                  <a:srgbClr val="FF0000"/>
-                </a:solidFill>
-              </a:rPr>
-              <a:t>Implicit Neural </a:t>
+              <a:rPr lang="en-CN" dirty="0"/>
+              <a:t>Introduction: World Model (cont.)</a:t>
+            </a:r>
+          </a:p>
+        </p:txBody>
+      </p:sp>
+      <p:sp>
+        <p:nvSpPr>
+          <p:cNvPr id="3" name="Content Placeholder 2">
+            <a:extLst>
+              <a:ext uri="{FF2B5EF4-FFF2-40B4-BE49-F238E27FC236}">
+                <a16:creationId xmlns:a16="http://schemas.microsoft.com/office/drawing/2014/main" id="{E8E02550-5983-EE4A-B67B-C4A65C86C274}"/>
+              </a:ext>
+            </a:extLst>
+          </p:cNvPr>
+          <p:cNvSpPr>
+            <a:spLocks noGrp="1"/>
+          </p:cNvSpPr>
+          <p:nvPr>
+            <p:ph idx="1"/>
+          </p:nvPr>
+        </p:nvSpPr>
+        <p:spPr/>
+        <p:txBody>
+          <a:bodyPr/>
+          <a:lstStyle/>
+          <a:p>
+            <a:pPr marL="0" indent="0">
+              <a:buNone/>
+            </a:pPr>
+            <a:r>
+              <a:rPr lang="en-US" dirty="0"/>
+              <a:t>Why is important:</a:t>
+            </a:r>
+          </a:p>
+          <a:p>
+            <a:r>
+              <a:rPr lang="en-US" b="1" dirty="0"/>
+              <a:t>Perceive</a:t>
+            </a:r>
+            <a:r>
+              <a:rPr lang="en-US" dirty="0"/>
+              <a:t>: abstract the external world to gain a deep understanding of its underlying mechanisms</a:t>
+            </a:r>
+          </a:p>
+          <a:p>
+            <a:r>
+              <a:rPr lang="en-US" b="1" dirty="0"/>
+              <a:t>Predict</a:t>
+            </a:r>
+            <a:r>
+              <a:rPr lang="en-US" dirty="0"/>
+              <a:t>: possess the capacity to envision possible future states to inform decision-making.</a:t>
+            </a:r>
+          </a:p>
+          <a:p>
+            <a:pPr marL="0" indent="0">
+              <a:buNone/>
+            </a:pPr>
+            <a:r>
+              <a:rPr lang="en-US" dirty="0"/>
+              <a:t>How to (the classical way):</a:t>
+            </a:r>
+          </a:p>
+          <a:p>
+            <a:r>
+              <a:rPr lang="en-CN" b="1" dirty="0"/>
+              <a:t>Derive from physics laws</a:t>
+            </a:r>
+            <a:r>
+              <a:rPr lang="en-CN" dirty="0"/>
+              <a:t>:  from </a:t>
             </a:r>
             <a:r>
               <a:rPr lang="en-CN" dirty="0">
@@ -4859,103 +5588,76 @@
                   <a:srgbClr val="0070C0"/>
                 </a:solidFill>
               </a:rPr>
-              <a:t>Representations</a:t>
-            </a:r>
-            <a:r>
-              <a:rPr lang="en-CN" dirty="0"/>
-              <a:t> (INRs)</a:t>
-            </a:r>
-          </a:p>
-        </p:txBody>
-      </p:sp>
-      <p:sp>
-        <p:nvSpPr>
-          <p:cNvPr id="3" name="Content Placeholder 2">
-            <a:extLst>
-              <a:ext uri="{FF2B5EF4-FFF2-40B4-BE49-F238E27FC236}">
-                <a16:creationId xmlns:a16="http://schemas.microsoft.com/office/drawing/2014/main" id="{A8FE1EB0-9FFA-1346-918E-0FD966E98BF7}"/>
-              </a:ext>
-            </a:extLst>
-          </p:cNvPr>
-          <p:cNvSpPr>
-            <a:spLocks noGrp="1"/>
-          </p:cNvSpPr>
-          <p:nvPr>
-            <p:ph idx="1"/>
-          </p:nvPr>
-        </p:nvSpPr>
-        <p:spPr/>
-        <p:txBody>
-          <a:bodyPr>
-            <a:normAutofit/>
-          </a:bodyPr>
-          <a:lstStyle/>
-          <a:p>
-            <a:r>
-              <a:rPr lang="en-CN" dirty="0"/>
-              <a:t>// TODO what is INR.</a:t>
-            </a:r>
-          </a:p>
-          <a:p>
-            <a:r>
-              <a:rPr lang="en-CN" dirty="0"/>
-              <a:t>Use a </a:t>
-            </a:r>
-            <a:r>
-              <a:rPr lang="en-CN" dirty="0">
-                <a:solidFill>
-                  <a:srgbClr val="FF0000"/>
-                </a:solidFill>
-              </a:rPr>
-              <a:t>neural net </a:t>
-            </a:r>
-            <a:r>
-              <a:rPr lang="en-CN" dirty="0"/>
-              <a:t>to </a:t>
-            </a:r>
-            <a:r>
-              <a:rPr lang="en-CN" dirty="0">
+              <a:t>Newton’s Laws, </a:t>
+            </a:r>
+            <a:r>
+              <a:rPr lang="en-US" dirty="0">
                 <a:solidFill>
                   <a:srgbClr val="0070C0"/>
                 </a:solidFill>
               </a:rPr>
-              <a:t>fit (represent) </a:t>
-            </a:r>
-            <a:r>
-              <a:rPr lang="en-CN" dirty="0"/>
-              <a:t>the desired model.</a:t>
-            </a:r>
-          </a:p>
-          <a:p>
-            <a:r>
-              <a:rPr lang="en-CN" dirty="0"/>
-              <a:t>// TODO: why this will work – train NN to do interpolation/regression</a:t>
-            </a:r>
-          </a:p>
-          <a:p>
-            <a:r>
-              <a:rPr lang="en-CN" dirty="0"/>
-              <a:t>// TODO: the loss can depends on the physics law (typically), or data (optional as an aid).</a:t>
-            </a:r>
-          </a:p>
-          <a:p>
-            <a:r>
-              <a:rPr lang="en-CN" dirty="0"/>
-              <a:t>// TODO, note the MLPs as an example</a:t>
-            </a:r>
-          </a:p>
-          <a:p>
-            <a:r>
-              <a:rPr lang="en-CN" dirty="0"/>
-              <a:t>// TODO, different models/tricks exists, such as model arch (KAN) and positional embeddings (sinusoidal), but the big idea is above.</a:t>
-            </a:r>
+              <a:t>constitutive equations, and</a:t>
+            </a:r>
+            <a:r>
+              <a:rPr kumimoji="0" lang="en-CN" sz="2800" b="0" i="0" u="none" strike="noStrike" kern="1200" cap="none" spc="0" normalizeH="0" baseline="0" noProof="0" dirty="0">
+                <a:ln>
+                  <a:noFill/>
+                </a:ln>
+                <a:solidFill>
+                  <a:srgbClr val="0070C0"/>
+                </a:solidFill>
+                <a:effectLst/>
+                <a:uLnTx/>
+                <a:uFillTx/>
+                <a:latin typeface="Calibri" panose="020F0502020204030204"/>
+                <a:ea typeface="+mn-ea"/>
+                <a:cs typeface="+mn-cs"/>
+              </a:rPr>
+              <a:t> PDEs</a:t>
+            </a:r>
+            <a:r>
+              <a:rPr lang="en-CN" dirty="0"/>
+              <a:t> to </a:t>
+            </a:r>
+            <a:r>
+              <a:rPr kumimoji="0" lang="en-CN" sz="2800" b="0" i="0" u="none" strike="noStrike" kern="1200" cap="none" spc="0" normalizeH="0" baseline="0" noProof="0" dirty="0">
+                <a:ln>
+                  <a:noFill/>
+                </a:ln>
+                <a:solidFill>
+                  <a:srgbClr val="FF0000"/>
+                </a:solidFill>
+                <a:effectLst/>
+                <a:uLnTx/>
+                <a:uFillTx/>
+                <a:latin typeface="Calibri" panose="020F0502020204030204"/>
+                <a:ea typeface="+mn-ea"/>
+                <a:cs typeface="+mn-cs"/>
+              </a:rPr>
+              <a:t>discretized ODE/linear systems</a:t>
+            </a:r>
+          </a:p>
+          <a:p>
+            <a:r>
+              <a:rPr lang="en-CN" b="1" dirty="0"/>
+              <a:t>Learn from data/physics laws</a:t>
+            </a:r>
+            <a:r>
+              <a:rPr lang="en-CN" dirty="0"/>
+              <a:t>: today’s talk</a:t>
+            </a:r>
+            <a:endParaRPr lang="en-CN" dirty="0">
+              <a:solidFill>
+                <a:srgbClr val="FF0000"/>
+              </a:solidFill>
+            </a:endParaRPr>
           </a:p>
         </p:txBody>
       </p:sp>
     </p:spTree>
     <p:extLst>
       <p:ext uri="{BB962C8B-B14F-4D97-AF65-F5344CB8AC3E}">
-        <p14:creationId xmlns:p14="http://schemas.microsoft.com/office/powerpoint/2010/main" val="392219737"/>
+        <p14:creationId xmlns:p14="http://schemas.microsoft.com/office/powerpoint/2010/main" val="2397593720"/>
       </p:ext>
     </p:extLst>
   </p:cSld>
@@ -5004,14 +5706,25 @@
           <a:lstStyle/>
           <a:p>
             <a:r>
-              <a:rPr lang="en-CN" dirty="0"/>
-              <a:t>INRs: The </a:t>
-            </a:r>
-            <a:r>
-              <a:rPr lang="en-US" dirty="0"/>
-              <a:t>Double Pendulum Example</a:t>
-            </a:r>
-            <a:endParaRPr lang="en-CN" dirty="0"/>
+              <a:rPr lang="en-CN" dirty="0">
+                <a:solidFill>
+                  <a:srgbClr val="FF0000"/>
+                </a:solidFill>
+              </a:rPr>
+              <a:t>Implicit Neural </a:t>
+            </a:r>
+            <a:r>
+              <a:rPr lang="en-CN" dirty="0">
+                <a:solidFill>
+                  <a:srgbClr val="0070C0"/>
+                </a:solidFill>
+              </a:rPr>
+              <a:t>Representations</a:t>
+            </a:r>
+            <a:r>
+              <a:rPr lang="en-CN" dirty="0"/>
+              <a:t> (INRs)</a:t>
+            </a:r>
           </a:p>
         </p:txBody>
       </p:sp>
@@ -5033,36 +5746,68 @@
         </p:nvSpPr>
         <p:spPr/>
         <p:txBody>
-          <a:bodyPr/>
-          <a:lstStyle/>
-          <a:p>
-            <a:r>
-              <a:rPr lang="en-CN" dirty="0"/>
-              <a:t>// How To part.</a:t>
-            </a:r>
-          </a:p>
-          <a:p>
-            <a:r>
-              <a:rPr lang="en-CN" dirty="0"/>
-              <a:t>// TODO: Write some code, describe how to use a mlp to represent it.</a:t>
-            </a:r>
-          </a:p>
-          <a:p>
-            <a:r>
-              <a:rPr lang="en-CN" dirty="0"/>
-              <a:t>// a mlp that maps (x, t) to x.</a:t>
-            </a:r>
-          </a:p>
-          <a:p>
-            <a:r>
-              <a:rPr lang="en-CN" dirty="0"/>
-              <a:t>// LOSS(data): regression, direct MSE loss.</a:t>
-            </a:r>
-          </a:p>
-          <a:p>
-            <a:r>
-              <a:rPr lang="en-CN" dirty="0"/>
-              <a:t>// LOSS(data free): define losses according to the ODE and initial/boundary conditions</a:t>
+          <a:bodyPr>
+            <a:normAutofit/>
+          </a:bodyPr>
+          <a:lstStyle/>
+          <a:p>
+            <a:r>
+              <a:rPr lang="en-CN" dirty="0"/>
+              <a:t>// TODO what is INR.</a:t>
+            </a:r>
+          </a:p>
+          <a:p>
+            <a:r>
+              <a:rPr lang="en-CN" dirty="0"/>
+              <a:t>Use a </a:t>
+            </a:r>
+            <a:r>
+              <a:rPr lang="en-CN" dirty="0">
+                <a:solidFill>
+                  <a:srgbClr val="FF0000"/>
+                </a:solidFill>
+              </a:rPr>
+              <a:t>neural net </a:t>
+            </a:r>
+            <a:r>
+              <a:rPr lang="en-CN" dirty="0"/>
+              <a:t>to </a:t>
+            </a:r>
+            <a:r>
+              <a:rPr lang="en-CN" dirty="0">
+                <a:solidFill>
+                  <a:srgbClr val="0070C0"/>
+                </a:solidFill>
+              </a:rPr>
+              <a:t>fit (represent) </a:t>
+            </a:r>
+            <a:r>
+              <a:rPr lang="en-CN" dirty="0"/>
+              <a:t>the desired model.</a:t>
+            </a:r>
+          </a:p>
+          <a:p>
+            <a:r>
+              <a:rPr lang="en-CN" dirty="0"/>
+              <a:t>// TODO: why this will work – train NN to do interpolation/regression</a:t>
+            </a:r>
+          </a:p>
+          <a:p>
+            <a:r>
+              <a:rPr lang="en-CN" dirty="0"/>
+              <a:t>// TODO: the loss can depends on the physics law (typically), or data (optional as an aid).</a:t>
+            </a:r>
+          </a:p>
+          <a:p>
+            <a:r>
+              <a:rPr lang="en-CN" dirty="0"/>
+              <a:t>// TODO, note the MLPs as an example</a:t>
+            </a:r>
+          </a:p>
+          <a:p>
+            <a:r>
+              <a:rPr lang="en-CN" dirty="0"/>
+              <a:t>// TODO, different models/tricks exists, such as model arch (KAN) and positional embeddings (sinusoidal), but the big idea is above.</a:t>
             </a:r>
           </a:p>
         </p:txBody>
@@ -5070,7 +5815,7 @@
     </p:spTree>
     <p:extLst>
       <p:ext uri="{BB962C8B-B14F-4D97-AF65-F5344CB8AC3E}">
-        <p14:creationId xmlns:p14="http://schemas.microsoft.com/office/powerpoint/2010/main" val="2032684028"/>
+        <p14:creationId xmlns:p14="http://schemas.microsoft.com/office/powerpoint/2010/main" val="392219737"/>
       </p:ext>
     </p:extLst>
   </p:cSld>
@@ -5120,8 +5865,13 @@
           <a:p>
             <a:r>
               <a:rPr lang="en-CN" dirty="0"/>
-              <a:t>INRs: Takeaways</a:t>
-            </a:r>
+              <a:t>INRs: The </a:t>
+            </a:r>
+            <a:r>
+              <a:rPr lang="en-US" dirty="0"/>
+              <a:t>Double Pendulum Example</a:t>
+            </a:r>
+            <a:endParaRPr lang="en-CN" dirty="0"/>
           </a:p>
         </p:txBody>
       </p:sp>
@@ -5148,60 +5898,39 @@
           <a:p>
             <a:r>
               <a:rPr lang="en-CN" dirty="0"/>
-              <a:t>The learned model itself is the world model!</a:t>
-            </a:r>
-          </a:p>
-          <a:p>
-            <a:r>
-              <a:rPr lang="en-CN" dirty="0"/>
-              <a:t>// Advantages: data is optional and the method itself can be very flexible (various applications).</a:t>
-            </a:r>
-          </a:p>
-          <a:p>
-            <a:r>
-              <a:rPr lang="en-US" dirty="0"/>
-              <a:t>// TODO: other names exists! E.g. PINNs. </a:t>
-            </a:r>
-            <a:r>
-              <a:rPr lang="en-US" dirty="0" err="1"/>
-              <a:t>NeRF</a:t>
-            </a:r>
-            <a:r>
-              <a:rPr lang="en-US" dirty="0"/>
-              <a:t>. They are INRs in different area/community, but the people like tends to use that name.</a:t>
-            </a:r>
-            <a:endParaRPr lang="en-CN" dirty="0"/>
-          </a:p>
-          <a:p>
-            <a:r>
-              <a:rPr lang="en-CN" dirty="0"/>
-              <a:t>// Disadvantages: efficiency very slow to train, and per-case</a:t>
-            </a:r>
-          </a:p>
-          <a:p>
-            <a:r>
-              <a:rPr lang="en-CN" dirty="0"/>
-              <a:t>// Dis2: not accurate – see the paper (pinn requires near zero loss)</a:t>
-            </a:r>
-          </a:p>
-          <a:p>
-            <a:r>
-              <a:rPr lang="en-CN" dirty="0"/>
-              <a:t>// why: The physical law typically has higher order derivatives and the PDEs/BC/IC are actually regarded as a “penelization”</a:t>
-            </a:r>
-          </a:p>
-          <a:p>
-            <a:pPr marL="0" indent="0">
-              <a:buNone/>
-            </a:pPr>
-            <a:endParaRPr lang="en-CN" dirty="0"/>
+              <a:t>// How To part.</a:t>
+            </a:r>
+          </a:p>
+          <a:p>
+            <a:r>
+              <a:rPr lang="en-CN" dirty="0"/>
+              <a:t>// TODO: Write some code, describe how to use a mlp to represent it.</a:t>
+            </a:r>
+          </a:p>
+          <a:p>
+            <a:r>
+              <a:rPr lang="en-CN" dirty="0"/>
+              <a:t>// a mlp that maps (x, t) to x.</a:t>
+            </a:r>
+          </a:p>
+          <a:p>
+            <a:r>
+              <a:rPr lang="en-CN" dirty="0"/>
+              <a:t>// LOSS(data): regression, direct MSE loss.</a:t>
+            </a:r>
+          </a:p>
+          <a:p>
+            <a:r>
+              <a:rPr lang="en-CN" dirty="0"/>
+              <a:t>// LOSS(data free): define losses according to the ODE and initial/boundary conditions</a:t>
+            </a:r>
           </a:p>
         </p:txBody>
       </p:sp>
     </p:spTree>
     <p:extLst>
       <p:ext uri="{BB962C8B-B14F-4D97-AF65-F5344CB8AC3E}">
-        <p14:creationId xmlns:p14="http://schemas.microsoft.com/office/powerpoint/2010/main" val="2302255907"/>
+        <p14:creationId xmlns:p14="http://schemas.microsoft.com/office/powerpoint/2010/main" val="2032684028"/>
       </p:ext>
     </p:extLst>
   </p:cSld>
@@ -5251,31 +5980,7 @@
           <a:p>
             <a:r>
               <a:rPr lang="en-CN" dirty="0"/>
-              <a:t>Learn an </a:t>
-            </a:r>
-            <a:r>
-              <a:rPr lang="en-CN" dirty="0">
-                <a:solidFill>
-                  <a:srgbClr val="FF0000"/>
-                </a:solidFill>
-              </a:rPr>
-              <a:t>End</a:t>
-            </a:r>
-            <a:r>
-              <a:rPr lang="en-CN" dirty="0"/>
-              <a:t>-to-</a:t>
-            </a:r>
-            <a:r>
-              <a:rPr lang="en-CN" dirty="0">
-                <a:solidFill>
-                  <a:srgbClr val="0070C0"/>
-                </a:solidFill>
-              </a:rPr>
-              <a:t>End</a:t>
-            </a:r>
-            <a:r>
-              <a:rPr lang="en-CN" dirty="0"/>
-              <a:t> Solver (E2E)</a:t>
+              <a:t>INRs: Takeaways</a:t>
             </a:r>
           </a:p>
         </p:txBody>
@@ -5303,98 +6008,60 @@
           <a:p>
             <a:r>
               <a:rPr lang="en-CN" dirty="0"/>
-              <a:t>Suppose we have a large set of data of some physical </a:t>
-            </a:r>
+              <a:t>The learned model itself is the world model!</a:t>
+            </a:r>
+          </a:p>
+          <a:p>
+            <a:r>
+              <a:rPr lang="en-CN" dirty="0"/>
+              <a:t>// Advantages: data is optional and the method itself can be very flexible (various applications).</a:t>
+            </a:r>
+          </a:p>
+          <a:p>
             <a:r>
               <a:rPr lang="en-US" dirty="0"/>
-              <a:t>phenomena, </a:t>
-            </a:r>
-          </a:p>
-          <a:p>
+              <a:t>// TODO: other names exists! E.g. PINNs. </a:t>
+            </a:r>
+            <a:r>
+              <a:rPr lang="en-US" dirty="0" err="1"/>
+              <a:t>NeRF</a:t>
+            </a:r>
             <a:r>
               <a:rPr lang="en-US" dirty="0"/>
-              <a:t>Train a large neural network to “memorize”: given </a:t>
-            </a:r>
-            <a:r>
-              <a:rPr lang="en-US" dirty="0">
-                <a:solidFill>
-                  <a:srgbClr val="FF0000"/>
-                </a:solidFill>
-              </a:rPr>
-              <a:t>boundary/initial condition B, X_0</a:t>
-            </a:r>
-            <a:r>
-              <a:rPr lang="en-US" dirty="0"/>
-              <a:t>, and the state </a:t>
-            </a:r>
-            <a:r>
-              <a:rPr lang="en-US" dirty="0" err="1">
-                <a:solidFill>
-                  <a:srgbClr val="0070C0"/>
-                </a:solidFill>
-              </a:rPr>
-              <a:t>X_t</a:t>
-            </a:r>
-            <a:r>
-              <a:rPr lang="en-US" dirty="0"/>
-              <a:t>.</a:t>
-            </a:r>
-          </a:p>
-          <a:p>
-            <a:pPr lvl="1"/>
-            <a:r>
-              <a:rPr lang="en-US" dirty="0"/>
-              <a:t>or just x_t-1 to </a:t>
-            </a:r>
-            <a:r>
-              <a:rPr lang="en-US" dirty="0" err="1"/>
-              <a:t>x_t</a:t>
-            </a:r>
-            <a:r>
-              <a:rPr lang="en-US" dirty="0"/>
-              <a:t>, with some </a:t>
-            </a:r>
-            <a:r>
-              <a:rPr lang="en-US" dirty="0" err="1"/>
-              <a:t>bc</a:t>
-            </a:r>
-            <a:r>
-              <a:rPr lang="en-US" dirty="0"/>
-              <a:t>.</a:t>
-            </a:r>
-          </a:p>
-          <a:p>
-            <a:r>
-              <a:rPr lang="en-US" dirty="0"/>
-              <a:t>When will be this large set available: weather </a:t>
-            </a:r>
-            <a:r>
-              <a:rPr lang="en-US" dirty="0" err="1"/>
-              <a:t>forcast</a:t>
-            </a:r>
-            <a:r>
-              <a:rPr lang="en-US" dirty="0"/>
-              <a:t>!</a:t>
-            </a:r>
-          </a:p>
-          <a:p>
-            <a:r>
-              <a:rPr lang="en-US" dirty="0"/>
-              <a:t>// TODO: what is E2E solver, formally.</a:t>
-            </a:r>
-          </a:p>
-          <a:p>
-            <a:r>
-              <a:rPr lang="en-US" dirty="0"/>
-              <a:t>// TODO: why this will work?</a:t>
-            </a:r>
+              <a:t>. They are INRs in different area/community, but the people like tends to use that name.</a:t>
+            </a:r>
+            <a:endParaRPr lang="en-CN" dirty="0"/>
+          </a:p>
+          <a:p>
+            <a:r>
+              <a:rPr lang="en-CN" dirty="0"/>
+              <a:t>// Disadvantages: efficiency very slow to train, and per-case</a:t>
+            </a:r>
+          </a:p>
+          <a:p>
+            <a:r>
+              <a:rPr lang="en-CN" dirty="0"/>
+              <a:t>// Dis2: not accurate – see the paper (pinn requires near zero loss)</a:t>
+            </a:r>
+          </a:p>
+          <a:p>
+            <a:r>
+              <a:rPr lang="en-CN" dirty="0"/>
+              <a:t>// why: The physical law typically has higher order derivatives and the PDEs/BC/IC are actually regarded as a “penelization”</a:t>
+            </a:r>
+          </a:p>
+          <a:p>
+            <a:pPr marL="0" indent="0">
+              <a:buNone/>
+            </a:pPr>
+            <a:endParaRPr lang="en-CN" dirty="0"/>
           </a:p>
         </p:txBody>
       </p:sp>
     </p:spTree>
     <p:extLst>
       <p:ext uri="{BB962C8B-B14F-4D97-AF65-F5344CB8AC3E}">
-        <p14:creationId xmlns:p14="http://schemas.microsoft.com/office/powerpoint/2010/main" val="2947620324"/>
+        <p14:creationId xmlns:p14="http://schemas.microsoft.com/office/powerpoint/2010/main" val="2302255907"/>
       </p:ext>
     </p:extLst>
   </p:cSld>
@@ -5421,22 +6088,22 @@
         <a:srgbClr val="E7E6E6"/>
       </a:lt2>
       <a:accent1>
-        <a:srgbClr val="29AF8C"/>
+        <a:srgbClr val="4472C4"/>
       </a:accent1>
       <a:accent2>
-        <a:srgbClr val="97BE49"/>
+        <a:srgbClr val="ED7D31"/>
       </a:accent2>
       <a:accent3>
-        <a:srgbClr val="3D9CCC"/>
+        <a:srgbClr val="A5A5A5"/>
       </a:accent3>
       <a:accent4>
-        <a:srgbClr val="7C60C6"/>
+        <a:srgbClr val="FFC000"/>
       </a:accent4>
       <a:accent5>
-        <a:srgbClr val="C9492C"/>
+        <a:srgbClr val="5B9BD5"/>
       </a:accent5>
       <a:accent6>
-        <a:srgbClr val="D58C2E"/>
+        <a:srgbClr val="70AD47"/>
       </a:accent6>
       <a:hlink>
         <a:srgbClr val="0563C1"/>
@@ -5659,7 +6326,302 @@
   <a:extraClrSchemeLst/>
   <a:extLst>
     <a:ext uri="{05A4C25C-085E-4340-85A3-A5531E510DB2}">
-      <thm15:themeFamily xmlns:thm15="http://schemas.microsoft.com/office/thememl/2012/main" name="Office Theme" id="{62F939B6-93AF-4DB8-9C6B-D6C7DFDC589F}" vid="{3E4F19A7-A959-40BB-972C-4880BAF8EB09}"/>
+      <thm15:themeFamily xmlns:thm15="http://schemas.microsoft.com/office/thememl/2012/main" name="Office Theme" id="{62F939B6-93AF-4DB8-9C6B-D6C7DFDC589F}" vid="{4A3C46E8-61CC-4603-A589-7422A47A8E4A}"/>
+    </a:ext>
+  </a:extLst>
+</a:theme>
+</file>
+
+<file path=ppt/theme/theme2.xml><?xml version="1.0" encoding="utf-8"?>
+<a:theme xmlns:a="http://schemas.openxmlformats.org/drawingml/2006/main" name="Office Theme">
+  <a:themeElements>
+    <a:clrScheme name="Office">
+      <a:dk1>
+        <a:sysClr val="windowText" lastClr="000000"/>
+      </a:dk1>
+      <a:lt1>
+        <a:sysClr val="window" lastClr="FFFFFF"/>
+      </a:lt1>
+      <a:dk2>
+        <a:srgbClr val="44546A"/>
+      </a:dk2>
+      <a:lt2>
+        <a:srgbClr val="E7E6E6"/>
+      </a:lt2>
+      <a:accent1>
+        <a:srgbClr val="4472C4"/>
+      </a:accent1>
+      <a:accent2>
+        <a:srgbClr val="ED7D31"/>
+      </a:accent2>
+      <a:accent3>
+        <a:srgbClr val="A5A5A5"/>
+      </a:accent3>
+      <a:accent4>
+        <a:srgbClr val="FFC000"/>
+      </a:accent4>
+      <a:accent5>
+        <a:srgbClr val="5B9BD5"/>
+      </a:accent5>
+      <a:accent6>
+        <a:srgbClr val="70AD47"/>
+      </a:accent6>
+      <a:hlink>
+        <a:srgbClr val="0563C1"/>
+      </a:hlink>
+      <a:folHlink>
+        <a:srgbClr val="954F72"/>
+      </a:folHlink>
+    </a:clrScheme>
+    <a:fontScheme name="Office">
+      <a:majorFont>
+        <a:latin typeface="Calibri Light" panose="020F0302020204030204"/>
+        <a:ea typeface=""/>
+        <a:cs typeface=""/>
+        <a:font script="Jpan" typeface="游ゴシック Light"/>
+        <a:font script="Hang" typeface="맑은 고딕"/>
+        <a:font script="Hans" typeface="等线 Light"/>
+        <a:font script="Hant" typeface="新細明體"/>
+        <a:font script="Arab" typeface="Times New Roman"/>
+        <a:font script="Hebr" typeface="Times New Roman"/>
+        <a:font script="Thai" typeface="Angsana New"/>
+        <a:font script="Ethi" typeface="Nyala"/>
+        <a:font script="Beng" typeface="Vrinda"/>
+        <a:font script="Gujr" typeface="Shruti"/>
+        <a:font script="Khmr" typeface="MoolBoran"/>
+        <a:font script="Knda" typeface="Tunga"/>
+        <a:font script="Guru" typeface="Raavi"/>
+        <a:font script="Cans" typeface="Euphemia"/>
+        <a:font script="Cher" typeface="Plantagenet Cherokee"/>
+        <a:font script="Yiii" typeface="Microsoft Yi Baiti"/>
+        <a:font script="Tibt" typeface="Microsoft Himalaya"/>
+        <a:font script="Thaa" typeface="MV Boli"/>
+        <a:font script="Deva" typeface="Mangal"/>
+        <a:font script="Telu" typeface="Gautami"/>
+        <a:font script="Taml" typeface="Latha"/>
+        <a:font script="Syrc" typeface="Estrangelo Edessa"/>
+        <a:font script="Orya" typeface="Kalinga"/>
+        <a:font script="Mlym" typeface="Kartika"/>
+        <a:font script="Laoo" typeface="DokChampa"/>
+        <a:font script="Sinh" typeface="Iskoola Pota"/>
+        <a:font script="Mong" typeface="Mongolian Baiti"/>
+        <a:font script="Viet" typeface="Times New Roman"/>
+        <a:font script="Uigh" typeface="Microsoft Uighur"/>
+        <a:font script="Geor" typeface="Sylfaen"/>
+        <a:font script="Armn" typeface="Arial"/>
+        <a:font script="Bugi" typeface="Leelawadee UI"/>
+        <a:font script="Bopo" typeface="Microsoft JhengHei"/>
+        <a:font script="Java" typeface="Javanese Text"/>
+        <a:font script="Lisu" typeface="Segoe UI"/>
+        <a:font script="Mymr" typeface="Myanmar Text"/>
+        <a:font script="Nkoo" typeface="Ebrima"/>
+        <a:font script="Olck" typeface="Nirmala UI"/>
+        <a:font script="Osma" typeface="Ebrima"/>
+        <a:font script="Phag" typeface="Phagspa"/>
+        <a:font script="Syrn" typeface="Estrangelo Edessa"/>
+        <a:font script="Syrj" typeface="Estrangelo Edessa"/>
+        <a:font script="Syre" typeface="Estrangelo Edessa"/>
+        <a:font script="Sora" typeface="Nirmala UI"/>
+        <a:font script="Tale" typeface="Microsoft Tai Le"/>
+        <a:font script="Talu" typeface="Microsoft New Tai Lue"/>
+        <a:font script="Tfng" typeface="Ebrima"/>
+      </a:majorFont>
+      <a:minorFont>
+        <a:latin typeface="Calibri" panose="020F0502020204030204"/>
+        <a:ea typeface=""/>
+        <a:cs typeface=""/>
+        <a:font script="Jpan" typeface="游ゴシック"/>
+        <a:font script="Hang" typeface="맑은 고딕"/>
+        <a:font script="Hans" typeface="等线"/>
+        <a:font script="Hant" typeface="新細明體"/>
+        <a:font script="Arab" typeface="Arial"/>
+        <a:font script="Hebr" typeface="Arial"/>
+        <a:font script="Thai" typeface="Cordia New"/>
+        <a:font script="Ethi" typeface="Nyala"/>
+        <a:font script="Beng" typeface="Vrinda"/>
+        <a:font script="Gujr" typeface="Shruti"/>
+        <a:font script="Khmr" typeface="DaunPenh"/>
+        <a:font script="Knda" typeface="Tunga"/>
+        <a:font script="Guru" typeface="Raavi"/>
+        <a:font script="Cans" typeface="Euphemia"/>
+        <a:font script="Cher" typeface="Plantagenet Cherokee"/>
+        <a:font script="Yiii" typeface="Microsoft Yi Baiti"/>
+        <a:font script="Tibt" typeface="Microsoft Himalaya"/>
+        <a:font script="Thaa" typeface="MV Boli"/>
+        <a:font script="Deva" typeface="Mangal"/>
+        <a:font script="Telu" typeface="Gautami"/>
+        <a:font script="Taml" typeface="Latha"/>
+        <a:font script="Syrc" typeface="Estrangelo Edessa"/>
+        <a:font script="Orya" typeface="Kalinga"/>
+        <a:font script="Mlym" typeface="Kartika"/>
+        <a:font script="Laoo" typeface="DokChampa"/>
+        <a:font script="Sinh" typeface="Iskoola Pota"/>
+        <a:font script="Mong" typeface="Mongolian Baiti"/>
+        <a:font script="Viet" typeface="Arial"/>
+        <a:font script="Uigh" typeface="Microsoft Uighur"/>
+        <a:font script="Geor" typeface="Sylfaen"/>
+        <a:font script="Armn" typeface="Arial"/>
+        <a:font script="Bugi" typeface="Leelawadee UI"/>
+        <a:font script="Bopo" typeface="Microsoft JhengHei"/>
+        <a:font script="Java" typeface="Javanese Text"/>
+        <a:font script="Lisu" typeface="Segoe UI"/>
+        <a:font script="Mymr" typeface="Myanmar Text"/>
+        <a:font script="Nkoo" typeface="Ebrima"/>
+        <a:font script="Olck" typeface="Nirmala UI"/>
+        <a:font script="Osma" typeface="Ebrima"/>
+        <a:font script="Phag" typeface="Phagspa"/>
+        <a:font script="Syrn" typeface="Estrangelo Edessa"/>
+        <a:font script="Syrj" typeface="Estrangelo Edessa"/>
+        <a:font script="Syre" typeface="Estrangelo Edessa"/>
+        <a:font script="Sora" typeface="Nirmala UI"/>
+        <a:font script="Tale" typeface="Microsoft Tai Le"/>
+        <a:font script="Talu" typeface="Microsoft New Tai Lue"/>
+        <a:font script="Tfng" typeface="Ebrima"/>
+      </a:minorFont>
+    </a:fontScheme>
+    <a:fmtScheme name="Office">
+      <a:fillStyleLst>
+        <a:solidFill>
+          <a:schemeClr val="phClr"/>
+        </a:solidFill>
+        <a:gradFill rotWithShape="1">
+          <a:gsLst>
+            <a:gs pos="0">
+              <a:schemeClr val="phClr">
+                <a:lumMod val="110000"/>
+                <a:satMod val="105000"/>
+                <a:tint val="67000"/>
+              </a:schemeClr>
+            </a:gs>
+            <a:gs pos="50000">
+              <a:schemeClr val="phClr">
+                <a:lumMod val="105000"/>
+                <a:satMod val="103000"/>
+                <a:tint val="73000"/>
+              </a:schemeClr>
+            </a:gs>
+            <a:gs pos="100000">
+              <a:schemeClr val="phClr">
+                <a:lumMod val="105000"/>
+                <a:satMod val="109000"/>
+                <a:tint val="81000"/>
+              </a:schemeClr>
+            </a:gs>
+          </a:gsLst>
+          <a:lin ang="5400000" scaled="0"/>
+        </a:gradFill>
+        <a:gradFill rotWithShape="1">
+          <a:gsLst>
+            <a:gs pos="0">
+              <a:schemeClr val="phClr">
+                <a:satMod val="103000"/>
+                <a:lumMod val="102000"/>
+                <a:tint val="94000"/>
+              </a:schemeClr>
+            </a:gs>
+            <a:gs pos="50000">
+              <a:schemeClr val="phClr">
+                <a:satMod val="110000"/>
+                <a:lumMod val="100000"/>
+                <a:shade val="100000"/>
+              </a:schemeClr>
+            </a:gs>
+            <a:gs pos="100000">
+              <a:schemeClr val="phClr">
+                <a:lumMod val="99000"/>
+                <a:satMod val="120000"/>
+                <a:shade val="78000"/>
+              </a:schemeClr>
+            </a:gs>
+          </a:gsLst>
+          <a:lin ang="5400000" scaled="0"/>
+        </a:gradFill>
+      </a:fillStyleLst>
+      <a:lnStyleLst>
+        <a:ln w="6350" cap="flat" cmpd="sng" algn="ctr">
+          <a:solidFill>
+            <a:schemeClr val="phClr"/>
+          </a:solidFill>
+          <a:prstDash val="solid"/>
+          <a:miter lim="800000"/>
+        </a:ln>
+        <a:ln w="12700" cap="flat" cmpd="sng" algn="ctr">
+          <a:solidFill>
+            <a:schemeClr val="phClr"/>
+          </a:solidFill>
+          <a:prstDash val="solid"/>
+          <a:miter lim="800000"/>
+        </a:ln>
+        <a:ln w="19050" cap="flat" cmpd="sng" algn="ctr">
+          <a:solidFill>
+            <a:schemeClr val="phClr"/>
+          </a:solidFill>
+          <a:prstDash val="solid"/>
+          <a:miter lim="800000"/>
+        </a:ln>
+      </a:lnStyleLst>
+      <a:effectStyleLst>
+        <a:effectStyle>
+          <a:effectLst/>
+        </a:effectStyle>
+        <a:effectStyle>
+          <a:effectLst/>
+        </a:effectStyle>
+        <a:effectStyle>
+          <a:effectLst>
+            <a:outerShdw blurRad="57150" dist="19050" dir="5400000" algn="ctr" rotWithShape="0">
+              <a:srgbClr val="000000">
+                <a:alpha val="63000"/>
+              </a:srgbClr>
+            </a:outerShdw>
+          </a:effectLst>
+        </a:effectStyle>
+      </a:effectStyleLst>
+      <a:bgFillStyleLst>
+        <a:solidFill>
+          <a:schemeClr val="phClr"/>
+        </a:solidFill>
+        <a:solidFill>
+          <a:schemeClr val="phClr">
+            <a:tint val="95000"/>
+            <a:satMod val="170000"/>
+          </a:schemeClr>
+        </a:solidFill>
+        <a:gradFill rotWithShape="1">
+          <a:gsLst>
+            <a:gs pos="0">
+              <a:schemeClr val="phClr">
+                <a:tint val="93000"/>
+                <a:satMod val="150000"/>
+                <a:shade val="98000"/>
+                <a:lumMod val="102000"/>
+              </a:schemeClr>
+            </a:gs>
+            <a:gs pos="50000">
+              <a:schemeClr val="phClr">
+                <a:tint val="98000"/>
+                <a:satMod val="130000"/>
+                <a:shade val="90000"/>
+                <a:lumMod val="103000"/>
+              </a:schemeClr>
+            </a:gs>
+            <a:gs pos="100000">
+              <a:schemeClr val="phClr">
+                <a:shade val="63000"/>
+                <a:satMod val="120000"/>
+              </a:schemeClr>
+            </a:gs>
+          </a:gsLst>
+          <a:lin ang="5400000" scaled="0"/>
+        </a:gradFill>
+      </a:bgFillStyleLst>
+    </a:fmtScheme>
+  </a:themeElements>
+  <a:objectDefaults/>
+  <a:extraClrSchemeLst/>
+  <a:extLst>
+    <a:ext uri="{05A4C25C-085E-4340-85A3-A5531E510DB2}">
+      <thm15:themeFamily xmlns:thm15="http://schemas.microsoft.com/office/thememl/2012/main" name="Office Theme" id="{62F939B6-93AF-4DB8-9C6B-D6C7DFDC589F}" vid="{4A3C46E8-61CC-4603-A589-7422A47A8E4A}"/>
     </a:ext>
   </a:extLst>
 </a:theme>
